--- a/slides/pptx/week05.pptx
+++ b/slides/pptx/week05.pptx
@@ -21,9 +21,10 @@
     <p:sldId id="269" r:id="rId15"/>
     <p:sldId id="270" r:id="rId16"/>
     <p:sldId id="271" r:id="rId17"/>
+    <p:sldId id="272" r:id="rId18"/>
   </p:sldIdLst>
   <p:notesMasterIdLst>
-    <p:notesMasterId r:id="rId18"/>
+    <p:notesMasterId r:id="rId19"/>
   </p:notesMasterIdLst>
   <p:sldSz cx="9144000" cy="5143500"/>
   <p:notesSz cx="5143500" cy="9144000"/>
@@ -605,7 +606,7 @@
           <a:p>
             <a:r>
               <a:rPr lang="en-US" dirty="0"/>
-              <a:t>Quick reference for the worksheet. ~1 min.</a:t>
+              <a:t>Quick reference for the worksheet — these three are what's graded this week. Clickjacking (CWE-1021) isn't part of this lab; don't cite it here. ~1 min.</a:t>
             </a:r>
             <a:endParaRPr lang="en-US" dirty="0"/>
           </a:p>
@@ -693,7 +694,7 @@
           <a:p>
             <a:r>
               <a:rPr lang="en-US" dirty="0"/>
-              <a:t>The payoff. #1: encode for the OUTPUT CONTEXT (the bug is on output). Modern frameworks auto-escape — the danger is when devs opt out (innerHTML). CSP is defense-in-depth: even if a payload lands, the browser refuses to run it. ~6 min.</a:t>
+              <a:t>The payoff. #1: encode for the OUTPUT CONTEXT (the bug is on output). Modern frameworks auto-escape — the danger is when devs opt out (innerHTML). Be accurate about CSP here: this lab's escaping already neutralizes every payload before CSP would ever matter, so students will NOT see a CSP violation fire in the console today — it's set as a header, its blocking behavior is asserted, not demonstrated, in this sandbox. ~6 min.</a:t>
             </a:r>
             <a:endParaRPr lang="en-US" dirty="0"/>
           </a:p>
@@ -781,7 +782,7 @@
           <a:p>
             <a:r>
               <a:rPr lang="en-US" dirty="0"/>
-              <a:t>Explain before lab: golf = fewest characters → forces real understanding of contexts. Round 2 (defend) is the graded part. The "break a classmate's CSP" bonus teaches that CSP is hard to get right. ~3 min.</a:t>
+              <a:t>Explain before lab: this app is local, not Juice Shop; solo, not a bonus-round competition. The real graded turn is running fixed_app.py and showing escaping stops the golf payloads while CSRF still gets through — that contrast is the point. ~3 min.</a:t>
             </a:r>
             <a:endParaRPr lang="en-US" dirty="0"/>
           </a:p>
@@ -869,7 +870,7 @@
           <a:p>
             <a:r>
               <a:rPr lang="en-US" dirty="0"/>
-              <a:t>Logistics. Cookie theft must hit only the sandbox collector, not a real site (ethics). Step 3-4 (defend) are graded. Q6 of the quiz asks for their own scoring payload + the sink it hit.</a:t>
+              <a:t>Logistics. Step 4 is the one people get backwards: the defended app still falls to CSRF, on purpose — the lesson is that SameSite protects cookie *attachment*, not request *authorization*. Steps 3-4 (defend) are graded. Q6 of the quiz asks for their own scoring payload + the sink it hit.</a:t>
             </a:r>
             <a:endParaRPr lang="en-US" dirty="0"/>
           </a:p>
@@ -957,7 +958,7 @@
           <a:p>
             <a:r>
               <a:rPr lang="en-US" dirty="0"/>
-              <a:t>Before/after + the reasoning note. Remind the AI-resilient tasks count.</a:t>
+              <a:t>Logistics. Step 4 is the one people get backwards: the defended app still falls to CSRF, on purpose — the lesson is that SameSite protects cookie *attachment*, not request *authorization*. Steps 3-4 (defend) are graded. Q6 of the quiz asks for their own scoring payload + the sink it hit.</a:t>
             </a:r>
             <a:endParaRPr lang="en-US" dirty="0"/>
           </a:p>
@@ -1045,7 +1046,7 @@
           <a:p>
             <a:r>
               <a:rPr lang="en-US" dirty="0"/>
-              <a:t>Recap. Cold-call: "where is the XSS bug — input or output?" (output rendering). ~2 min.</a:t>
+              <a:t>Before/after + the reasoning note — the CSRF note is graded on getting the SameSite-doesn't-equal-authorization distinction right, not on claiming the defense worked. Remind the AI-resilient tasks count.</a:t>
             </a:r>
             <a:endParaRPr lang="en-US" dirty="0"/>
           </a:p>
@@ -1133,7 +1134,7 @@
           <a:p>
             <a:r>
               <a:rPr lang="en-US" dirty="0"/>
-              <a:t>Cliffhanger: "Next week — change one number in a URL and read someone else's data; forge a token and become admin." Remind Juice Shop ready.</a:t>
+              <a:t>Recap. Cold-call: "where is the XSS bug — input or output?" (output rendering). Second cold-call: "if SameSite=Strict is set, why did CSRF still work today?" (the endpoint never checked who was asking). ~2 min.</a:t>
             </a:r>
             <a:endParaRPr lang="en-US" dirty="0"/>
           </a:p>
@@ -1157,6 +1158,94 @@
             <a:fld id="{F7021451-1387-4CA6-816F-3879F97B5CBC}" type="slidenum">
               <a:rPr lang="en-US"/>
               <a:t>16</a:t>
+            </a:fld>
+            <a:endParaRPr lang="en-US"/>
+          </a:p>
+        </p:txBody>
+      </p:sp>
+    </p:spTree>
+    <p:extLst>
+      <p:ext uri="{BB962C8B-B14F-4D97-AF65-F5344CB8AC3E}">
+        <p14:creationId xmlns:p14="http://schemas.microsoft.com/office/powerpoint/2010/main" val="1024086991"/>
+      </p:ext>
+    </p:extLst>
+  </p:cSld>
+  <p:clrMapOvr>
+    <a:masterClrMapping/>
+  </p:clrMapOvr>
+</p:notes>
+</file>
+
+<file path=ppt/notesSlides/notesSlide17.xml><?xml version="1.0" encoding="utf-8"?>
+<p:notes xmlns:a="http://schemas.openxmlformats.org/drawingml/2006/main" xmlns:r="http://schemas.openxmlformats.org/officeDocument/2006/relationships" xmlns:p="http://schemas.openxmlformats.org/presentationml/2006/main">
+  <p:cSld>
+    <p:spTree>
+      <p:nvGrpSpPr>
+        <p:cNvPr id="1" name=""/>
+        <p:cNvGrpSpPr/>
+        <p:nvPr/>
+      </p:nvGrpSpPr>
+      <p:grpSpPr>
+        <a:xfrm>
+          <a:off x="0" y="0"/>
+          <a:ext cx="0" cy="0"/>
+          <a:chOff x="0" y="0"/>
+          <a:chExt cx="0" cy="0"/>
+        </a:xfrm>
+      </p:grpSpPr>
+      <p:sp>
+        <p:nvSpPr>
+          <p:cNvPr id="2" name="Slide Image Placeholder 1"/>
+          <p:cNvSpPr>
+            <a:spLocks noGrp="1" noRot="1" noChangeAspect="1"/>
+          </p:cNvSpPr>
+          <p:nvPr>
+            <p:ph type="sldImg"/>
+          </p:nvPr>
+        </p:nvSpPr>
+        <p:spPr/>
+      </p:sp>
+      <p:sp>
+        <p:nvSpPr>
+          <p:cNvPr id="3" name="Notes Placeholder 2"/>
+          <p:cNvSpPr>
+            <a:spLocks noGrp="1"/>
+          </p:cNvSpPr>
+          <p:nvPr>
+            <p:ph type="body" idx="1"/>
+          </p:nvPr>
+        </p:nvSpPr>
+        <p:spPr/>
+        <p:txBody>
+          <a:bodyPr/>
+          <a:lstStyle/>
+          <a:p>
+            <a:r>
+              <a:rPr lang="en-US" dirty="0"/>
+              <a:t>Cliffhanger: "Next week — change one number in a URL and read someone else's data; forge a token and become admin." Remind Juice Shop ready.</a:t>
+            </a:r>
+            <a:endParaRPr lang="en-US" dirty="0"/>
+          </a:p>
+        </p:txBody>
+      </p:sp>
+      <p:sp>
+        <p:nvSpPr>
+          <p:cNvPr id="4" name="Slide Number Placeholder 3"/>
+          <p:cNvSpPr>
+            <a:spLocks noGrp="1"/>
+          </p:cNvSpPr>
+          <p:nvPr>
+            <p:ph type="sldNum" sz="quarter" idx="10"/>
+          </p:nvPr>
+        </p:nvSpPr>
+        <p:spPr/>
+        <p:txBody>
+          <a:bodyPr/>
+          <a:lstStyle/>
+          <a:p>
+            <a:fld id="{F7021451-1387-4CA6-816F-3879F97B5CBC}" type="slidenum">
+              <a:rPr lang="en-US"/>
+              <a:t>17</a:t>
             </a:fld>
             <a:endParaRPr lang="en-US"/>
           </a:p>
@@ -1573,7 +1662,7 @@
           <a:p>
             <a:r>
               <a:rPr lang="en-US" dirty="0"/>
-              <a:t>Go row by row with an example each: reflected = malicious link; stored = a comment that attacks every viewer (worst); DOM = `location.hash` written to innerHTML. Ask which is most dangerous and why (stored — hits everyone). ~6 min.</a:t>
+              <a:t>Go row by row with an example each: reflected = malicious link; stored = a comment that attacks every viewer (worst); DOM = `location.hash` written to innerHTML. Ask which is most dangerous and why (stored — hits everyone). Be clear DOM isn't part of today's graded tasks. ~6 min.</a:t>
             </a:r>
             <a:endParaRPr lang="en-US" dirty="0"/>
           </a:p>
@@ -1661,7 +1750,7 @@
           <a:p>
             <a:r>
               <a:rPr lang="en-US" dirty="0"/>
-              <a:t>These are the XSS Golf payloads. Explain why `&lt;img onerror&gt;` works when `&lt;script&gt;` is filtered, and why `"&gt;` breaks out of an attribute first. The context point is the key learning — the same data needs different encoding in each place. ~6 min.</a:t>
+              <a:t>These are the XSS Golf payloads. There's no filter in this app to explain a bypass for — correct that instinct if it comes up. The context point (HTML body vs attribute vs JS vs URL) is still the real learning; `"&gt;` breaks out of an attribute first. ~6 min.</a:t>
             </a:r>
             <a:endParaRPr lang="en-US" dirty="0"/>
           </a:p>
@@ -1749,7 +1838,7 @@
           <a:p>
             <a:r>
               <a:rPr lang="en-US" dirty="0"/>
-              <a:t>Contrast with XSS: CSRF needs no script on the page — it abuses the browser auto-attaching cookies. Example: a hidden form that POSTs a transfer. SameSite cookies break the auto-send. ~5 min.</a:t>
+              <a:t>Contrast with XSS: CSRF needs no script on the page — it abuses the browser auto-attaching cookies. Example: a hidden form that POSTs a comment. Don't let "SameSite fixes CSRF" stand unqualified — this week's own fixed_app.py sets SameSite=Strict+HttpOnly+Secure and the CSRF PoC still works, because /comments never checks a session or token at all. ~5 min.</a:t>
             </a:r>
             <a:endParaRPr lang="en-US" dirty="0"/>
           </a:p>
@@ -2523,7 +2612,9 @@
           <a:ln/>
         </p:spPr>
         <p:txBody>
-          <a:bodyPr wrap="square" lIns="0" tIns="0" rIns="0" bIns="0" rtlCol="0" anchor="t"/>
+          <a:bodyPr wrap="square" lIns="0" tIns="0" rIns="0" bIns="0" rtlCol="0" anchor="t">
+            <a:normAutofit/>
+          </a:bodyPr>
           <a:lstStyle/>
           <a:p>
             <a:pPr marL="342900" indent="-342900">
@@ -2584,7 +2675,7 @@
                 <a:ea typeface="Calibri" pitchFamily="34" charset="-122"/>
                 <a:cs typeface="Calibri" pitchFamily="34" charset="-120"/>
               </a:rPr>
-              <a:t>CWE-1021 — improper restriction of rendered UI (clickjacking)</a:t>
+              <a:t>CWE-1004 — cookie set without HttpOnly (this week's cookie-theft task)</a:t>
             </a:r>
             <a:endParaRPr lang="en-US" sz="1400" dirty="0"/>
           </a:p>
@@ -2784,11 +2875,11 @@
         <p:spPr>
           <a:xfrm>
             <a:off x="457200" y="1325880"/>
-            <a:ext cx="8229600" cy="1517904"/>
+            <a:ext cx="8229600" cy="1920240"/>
           </a:xfrm>
           <a:prstGeom prst="roundRect">
             <a:avLst>
-              <a:gd name="adj" fmla="val 4819"/>
+              <a:gd name="adj" fmla="val 3810"/>
             </a:avLst>
           </a:prstGeom>
           <a:solidFill>
@@ -2813,7 +2904,7 @@
         <p:spPr>
           <a:xfrm>
             <a:off x="731520" y="1435608"/>
-            <a:ext cx="7680960" cy="1298448"/>
+            <a:ext cx="7680960" cy="1700784"/>
           </a:xfrm>
           <a:prstGeom prst="rect">
             <a:avLst/>
@@ -2822,7 +2913,9 @@
           <a:ln/>
         </p:spPr>
         <p:txBody>
-          <a:bodyPr wrap="square" lIns="0" tIns="0" rIns="0" bIns="0" rtlCol="0" anchor="t"/>
+          <a:bodyPr wrap="square" lIns="0" tIns="0" rIns="0" bIns="0" rtlCol="0" anchor="t">
+            <a:normAutofit/>
+          </a:bodyPr>
           <a:lstStyle/>
           <a:p>
             <a:pPr marL="342900" indent="-342900">
@@ -2883,7 +2976,7 @@
                 <a:ea typeface="Calibri" pitchFamily="34" charset="-122"/>
                 <a:cs typeface="Calibri" pitchFamily="34" charset="-120"/>
               </a:rPr>
-              <a:t>Content Security Policy — block inline/3rd-party scripts</a:t>
+              <a:t>Content Security Policy — a defense-in-depth header, set alongside escaping — it doesn't replace it</a:t>
             </a:r>
             <a:endParaRPr lang="en-US" sz="1400" dirty="0"/>
           </a:p>
@@ -2904,7 +2997,7 @@
                 <a:ea typeface="Calibri" pitchFamily="34" charset="-122"/>
                 <a:cs typeface="Calibri" pitchFamily="34" charset="-120"/>
               </a:rPr>
-              <a:t>HttpOnly + SameSite cookies; anti-CSRF tokens</a:t>
+              <a:t>HttpOnly + SameSite cookies; anti-CSRF tokens and an endpoint that actually checks who's asking</a:t>
             </a:r>
             <a:endParaRPr lang="en-US" sz="1400" dirty="0"/>
           </a:p>
@@ -3104,7 +3197,7 @@
         <p:spPr>
           <a:xfrm>
             <a:off x="548640" y="1325880"/>
-            <a:ext cx="8046720" cy="548640"/>
+            <a:ext cx="8046720" cy="822960"/>
           </a:xfrm>
           <a:prstGeom prst="rect">
             <a:avLst/>
@@ -3113,7 +3206,9 @@
           <a:ln/>
         </p:spPr>
         <p:txBody>
-          <a:bodyPr wrap="square" lIns="0" tIns="0" rIns="0" bIns="0" rtlCol="0" anchor="t"/>
+          <a:bodyPr wrap="square" lIns="0" tIns="0" rIns="0" bIns="0" rtlCol="0" anchor="t">
+            <a:normAutofit/>
+          </a:bodyPr>
           <a:lstStyle/>
           <a:p>
             <a:pPr indent="0" marL="0">
@@ -3128,7 +3223,7 @@
                 <a:ea typeface="Calibri" pitchFamily="34" charset="-122"/>
                 <a:cs typeface="Calibri" pitchFamily="34" charset="-120"/>
               </a:rPr>
-              <a:t>Craft the shortest payload that pops alert(1) / steals a cookie in Juice Shop.</a:t>
+              <a:t>Craft the shortest payload that pops alert(1) / steals a cookie against vulnerable_app.py.</a:t>
             </a:r>
             <a:endParaRPr lang="en-US" sz="1400" dirty="0"/>
           </a:p>
@@ -3142,12 +3237,12 @@
         </p:nvSpPr>
         <p:spPr>
           <a:xfrm>
-            <a:off x="457200" y="1965960"/>
-            <a:ext cx="8229600" cy="1207008"/>
+            <a:off x="457200" y="2240280"/>
+            <a:ext cx="8229600" cy="1298448"/>
           </a:xfrm>
           <a:prstGeom prst="roundRect">
             <a:avLst>
-              <a:gd name="adj" fmla="val 6061"/>
+              <a:gd name="adj" fmla="val 5634"/>
             </a:avLst>
           </a:prstGeom>
           <a:solidFill>
@@ -3171,8 +3266,8 @@
         </p:nvSpPr>
         <p:spPr>
           <a:xfrm>
-            <a:off x="731520" y="2075688"/>
-            <a:ext cx="7680960" cy="987552"/>
+            <a:off x="731520" y="2350008"/>
+            <a:ext cx="7680960" cy="1078992"/>
           </a:xfrm>
           <a:prstGeom prst="rect">
             <a:avLst/>
@@ -3181,7 +3276,9 @@
           <a:ln/>
         </p:spPr>
         <p:txBody>
-          <a:bodyPr wrap="square" lIns="0" tIns="0" rIns="0" bIns="0" rtlCol="0" anchor="t"/>
+          <a:bodyPr wrap="square" lIns="0" tIns="0" rIns="0" bIns="0" rtlCol="0" anchor="t">
+            <a:normAutofit/>
+          </a:bodyPr>
           <a:lstStyle/>
           <a:p>
             <a:pPr marL="342900" indent="-342900">
@@ -3200,7 +3297,7 @@
                 <a:ea typeface="Calibri" pitchFamily="34" charset="-122"/>
                 <a:cs typeface="Calibri" pitchFamily="34" charset="-120"/>
               </a:rPr>
-              <a:t>Leaderboard by character count</a:t>
+              <a:t>Solo scoring by character count (no filter to beat — it's a golf exercise, not a bypass race)</a:t>
             </a:r>
             <a:endParaRPr lang="en-US" sz="1400" dirty="0"/>
           </a:p>
@@ -3221,28 +3318,7 @@
                 <a:ea typeface="Calibri" pitchFamily="34" charset="-122"/>
                 <a:cs typeface="Calibri" pitchFamily="34" charset="-120"/>
               </a:rPr>
-              <a:t>Round 2: deploy a CSP + escaping that blocks every submitted payload</a:t>
-            </a:r>
-            <a:endParaRPr lang="en-US" sz="1400" dirty="0"/>
-          </a:p>
-          <a:p>
-            <a:pPr marL="342900" indent="-342900">
-              <a:spcAft>
-                <a:spcPts val="600"/>
-              </a:spcAft>
-              <a:buSzPct val="100000"/>
-              <a:buChar char="•"/>
-            </a:pPr>
-            <a:r>
-              <a:rPr lang="en-US" sz="1400" dirty="0">
-                <a:solidFill>
-                  <a:srgbClr val="1F2937"/>
-                </a:solidFill>
-                <a:latin typeface="Calibri" pitchFamily="34" charset="0"/>
-                <a:ea typeface="Calibri" pitchFamily="34" charset="-122"/>
-                <a:cs typeface="Calibri" pitchFamily="34" charset="-120"/>
-              </a:rPr>
-              <a:t>Bonus: break a classmate's CSP</a:t>
+              <a:t>Defend: run fixed_app.py — same payloads, now escaped — then prove CSRF still works against it and explain why</a:t>
             </a:r>
             <a:endParaRPr lang="en-US" sz="1400" dirty="0"/>
           </a:p>
@@ -3473,7 +3549,9 @@
           <a:ln/>
         </p:spPr>
         <p:txBody>
-          <a:bodyPr wrap="square" lIns="0" tIns="0" rIns="0" bIns="0" rtlCol="0" anchor="ctr"/>
+          <a:bodyPr wrap="square" lIns="0" tIns="0" rIns="0" bIns="0" rtlCol="0" anchor="ctr">
+            <a:normAutofit/>
+          </a:bodyPr>
           <a:lstStyle/>
           <a:p>
             <a:pPr indent="0" marL="0">
@@ -3562,7 +3640,7 @@
         <p:spPr>
           <a:xfrm>
             <a:off x="1051560" y="2313432"/>
-            <a:ext cx="7589520" cy="384048"/>
+            <a:ext cx="7589520" cy="658368"/>
           </a:xfrm>
           <a:prstGeom prst="rect">
             <a:avLst/>
@@ -3571,7 +3649,9 @@
           <a:ln/>
         </p:spPr>
         <p:txBody>
-          <a:bodyPr wrap="square" lIns="0" tIns="0" rIns="0" bIns="0" rtlCol="0" anchor="ctr"/>
+          <a:bodyPr wrap="square" lIns="0" tIns="0" rIns="0" bIns="0" rtlCol="0" anchor="ctr">
+            <a:normAutofit/>
+          </a:bodyPr>
           <a:lstStyle/>
           <a:p>
             <a:pPr indent="0" marL="0">
@@ -3586,7 +3666,7 @@
                 <a:ea typeface="Calibri" pitchFamily="34" charset="-122"/>
                 <a:cs typeface="Calibri" pitchFamily="34" charset="-120"/>
               </a:rPr>
-              <a:t>Find reflected + stored + DOM XSS in Juice Shop</a:t>
+              <a:t>Find reflected + stored XSS in vulnerable_app.py (DOM XSS via Juice Shop is optional/ungraded)</a:t>
             </a:r>
             <a:endParaRPr lang="en-US" sz="1350" dirty="0"/>
           </a:p>
@@ -3600,7 +3680,7 @@
         </p:nvSpPr>
         <p:spPr>
           <a:xfrm>
-            <a:off x="502920" y="2770632"/>
+            <a:off x="502920" y="3044952"/>
             <a:ext cx="384048" cy="384048"/>
           </a:xfrm>
           <a:prstGeom prst="ellipse">
@@ -3620,7 +3700,7 @@
         </p:nvSpPr>
         <p:spPr>
           <a:xfrm>
-            <a:off x="502920" y="2770632"/>
+            <a:off x="502920" y="3044952"/>
             <a:ext cx="384048" cy="384048"/>
           </a:xfrm>
           <a:prstGeom prst="rect">
@@ -3659,8 +3739,8 @@
         </p:nvSpPr>
         <p:spPr>
           <a:xfrm>
-            <a:off x="1051560" y="2770632"/>
-            <a:ext cx="7589520" cy="384048"/>
+            <a:off x="1051560" y="3044952"/>
+            <a:ext cx="7589520" cy="402336"/>
           </a:xfrm>
           <a:prstGeom prst="rect">
             <a:avLst/>
@@ -3669,7 +3749,9 @@
           <a:ln/>
         </p:spPr>
         <p:txBody>
-          <a:bodyPr wrap="square" lIns="0" tIns="0" rIns="0" bIns="0" rtlCol="0" anchor="ctr"/>
+          <a:bodyPr wrap="square" lIns="0" tIns="0" rIns="0" bIns="0" rtlCol="0" anchor="ctr">
+            <a:normAutofit/>
+          </a:bodyPr>
           <a:lstStyle/>
           <a:p>
             <a:pPr indent="0" marL="0">
@@ -3684,7 +3766,7 @@
                 <a:ea typeface="Calibri" pitchFamily="34" charset="-122"/>
                 <a:cs typeface="Calibri" pitchFamily="34" charset="-120"/>
               </a:rPr>
-              <a:t>Demonstrate cookie theft (sandbox)</a:t>
+              <a:t>Demonstrate cookie theft via the stored payload</a:t>
             </a:r>
             <a:endParaRPr lang="en-US" sz="1350" dirty="0"/>
           </a:p>
@@ -3698,7 +3780,7 @@
         </p:nvSpPr>
         <p:spPr>
           <a:xfrm>
-            <a:off x="502920" y="3227832"/>
+            <a:off x="502920" y="3520440"/>
             <a:ext cx="384048" cy="384048"/>
           </a:xfrm>
           <a:prstGeom prst="ellipse">
@@ -3718,7 +3800,7 @@
         </p:nvSpPr>
         <p:spPr>
           <a:xfrm>
-            <a:off x="502920" y="3227832"/>
+            <a:off x="502920" y="3520440"/>
             <a:ext cx="384048" cy="384048"/>
           </a:xfrm>
           <a:prstGeom prst="rect">
@@ -3757,8 +3839,8 @@
         </p:nvSpPr>
         <p:spPr>
           <a:xfrm>
-            <a:off x="1051560" y="3227832"/>
-            <a:ext cx="7589520" cy="384048"/>
+            <a:off x="1051560" y="3520440"/>
+            <a:ext cx="7589520" cy="402336"/>
           </a:xfrm>
           <a:prstGeom prst="rect">
             <a:avLst/>
@@ -3767,7 +3849,9 @@
           <a:ln/>
         </p:spPr>
         <p:txBody>
-          <a:bodyPr wrap="square" lIns="0" tIns="0" rIns="0" bIns="0" rtlCol="0" anchor="ctr"/>
+          <a:bodyPr wrap="square" lIns="0" tIns="0" rIns="0" bIns="0" rtlCol="0" anchor="ctr">
+            <a:normAutofit/>
+          </a:bodyPr>
           <a:lstStyle/>
           <a:p>
             <a:pPr indent="0" marL="0">
@@ -3782,7 +3866,7 @@
                 <a:ea typeface="Calibri" pitchFamily="34" charset="-122"/>
                 <a:cs typeface="Calibri" pitchFamily="34" charset="-120"/>
               </a:rPr>
-              <a:t>Add output encoding + a strict CSP header</a:t>
+              <a:t>Run fixed_app.py — confirm output encoding + CSP now block your XSS payloads</a:t>
             </a:r>
             <a:endParaRPr lang="en-US" sz="1350" dirty="0"/>
           </a:p>
@@ -3790,73 +3874,14 @@
       </p:sp>
       <p:sp>
         <p:nvSpPr>
-          <p:cNvPr id="16" name="Shape 13"/>
-          <p:cNvSpPr/>
-          <p:nvPr/>
-        </p:nvSpPr>
-        <p:spPr>
-          <a:xfrm>
-            <a:off x="502920" y="3685032"/>
-            <a:ext cx="384048" cy="384048"/>
-          </a:xfrm>
-          <a:prstGeom prst="ellipse">
-            <a:avLst/>
-          </a:prstGeom>
-          <a:solidFill>
-            <a:srgbClr val="E35205"/>
-          </a:solidFill>
-          <a:ln/>
-        </p:spPr>
-      </p:sp>
-      <p:sp>
-        <p:nvSpPr>
-          <p:cNvPr id="17" name="Text 14"/>
-          <p:cNvSpPr/>
-          <p:nvPr/>
-        </p:nvSpPr>
-        <p:spPr>
-          <a:xfrm>
-            <a:off x="502920" y="3685032"/>
-            <a:ext cx="384048" cy="384048"/>
-          </a:xfrm>
-          <a:prstGeom prst="rect">
-            <a:avLst/>
-          </a:prstGeom>
-          <a:noFill/>
-          <a:ln/>
-        </p:spPr>
-        <p:txBody>
-          <a:bodyPr wrap="square" lIns="0" tIns="0" rIns="0" bIns="0" rtlCol="0" anchor="ctr"/>
-          <a:lstStyle/>
-          <a:p>
-            <a:pPr algn="ctr" indent="0" marL="0">
-              <a:buNone/>
-            </a:pPr>
-            <a:r>
-              <a:rPr lang="en-US" sz="1500" b="1" dirty="0">
-                <a:solidFill>
-                  <a:srgbClr val="0E1726"/>
-                </a:solidFill>
-                <a:latin typeface="Arial" pitchFamily="34" charset="0"/>
-                <a:ea typeface="Arial" pitchFamily="34" charset="-122"/>
-                <a:cs typeface="Arial" pitchFamily="34" charset="-120"/>
-              </a:rPr>
-              <a:t>4</a:t>
-            </a:r>
-            <a:endParaRPr lang="en-US" sz="1500" dirty="0"/>
-          </a:p>
-        </p:txBody>
-      </p:sp>
-      <p:sp>
-        <p:nvSpPr>
-          <p:cNvPr id="18" name="Text 15"/>
-          <p:cNvSpPr/>
-          <p:nvPr/>
-        </p:nvSpPr>
-        <p:spPr>
-          <a:xfrm>
-            <a:off x="1051560" y="3685032"/>
-            <a:ext cx="7589520" cy="384048"/>
+          <p:cNvPr id="16" name="Text 13"/>
+          <p:cNvSpPr/>
+          <p:nvPr/>
+        </p:nvSpPr>
+        <p:spPr>
+          <a:xfrm>
+            <a:off x="457200" y="4800600"/>
+            <a:ext cx="6949440" cy="274320"/>
           </a:xfrm>
           <a:prstGeom prst="rect">
             <a:avLst/>
@@ -3872,53 +3897,14 @@
               <a:buNone/>
             </a:pPr>
             <a:r>
-              <a:rPr lang="en-US" sz="1350" dirty="0">
-                <a:solidFill>
-                  <a:srgbClr val="1F2937"/>
+              <a:rPr lang="en-US" sz="900" dirty="0">
+                <a:solidFill>
+                  <a:srgbClr val="64748B"/>
                 </a:solidFill>
                 <a:latin typeface="Calibri" pitchFamily="34" charset="0"/>
                 <a:ea typeface="Calibri" pitchFamily="34" charset="-122"/>
                 <a:cs typeface="Calibri" pitchFamily="34" charset="-120"/>
               </a:rPr>
-              <a:t>Demonstrate CSRF and its defense</a:t>
-            </a:r>
-            <a:endParaRPr lang="en-US" sz="1350" dirty="0"/>
-          </a:p>
-        </p:txBody>
-      </p:sp>
-      <p:sp>
-        <p:nvSpPr>
-          <p:cNvPr id="19" name="Text 16"/>
-          <p:cNvSpPr/>
-          <p:nvPr/>
-        </p:nvSpPr>
-        <p:spPr>
-          <a:xfrm>
-            <a:off x="457200" y="4800600"/>
-            <a:ext cx="6949440" cy="274320"/>
-          </a:xfrm>
-          <a:prstGeom prst="rect">
-            <a:avLst/>
-          </a:prstGeom>
-          <a:noFill/>
-          <a:ln/>
-        </p:spPr>
-        <p:txBody>
-          <a:bodyPr wrap="square" lIns="0" tIns="0" rIns="0" bIns="0" rtlCol="0" anchor="ctr"/>
-          <a:lstStyle/>
-          <a:p>
-            <a:pPr indent="0" marL="0">
-              <a:buNone/>
-            </a:pPr>
-            <a:r>
-              <a:rPr lang="en-US" sz="900" dirty="0">
-                <a:solidFill>
-                  <a:srgbClr val="64748B"/>
-                </a:solidFill>
-                <a:latin typeface="Calibri" pitchFamily="34" charset="0"/>
-                <a:ea typeface="Calibri" pitchFamily="34" charset="-122"/>
-                <a:cs typeface="Calibri" pitchFamily="34" charset="-120"/>
-              </a:rPr>
               <a:t>Software Security · Week 5</a:t>
             </a:r>
             <a:endParaRPr lang="en-US" sz="900" dirty="0"/>
@@ -3927,7 +3913,7 @@
       </p:sp>
       <p:pic>
         <p:nvPicPr>
-          <p:cNvPr id="20" name="Image 1" descr="/Users/pop7/Library/CloudStorage/OneDrive-MonsterConnectCo.,Ltd/Lecture/KOSEN69 - software-security/slides/pptx/assets/logo-small.png">    </p:cNvPr>
+          <p:cNvPr id="17" name="Image 1" descr="/Users/pop7/Library/CloudStorage/OneDrive-MonsterConnectCo.,Ltd/Lecture/KOSEN69 - software-security/slides/pptx/assets/logo-small.png">    </p:cNvPr>
           <p:cNvPicPr>
             <a:picLocks noChangeAspect="1"/>
           </p:cNvPicPr>
@@ -4065,7 +4051,7 @@
                 <a:ea typeface="Arial" pitchFamily="34" charset="-122"/>
                 <a:cs typeface="Arial" pitchFamily="34" charset="-120"/>
               </a:rPr>
-              <a:t>Deliverable</a:t>
+              <a:t>Lab steps (cont.)</a:t>
             </a:r>
             <a:endParaRPr lang="en-US" sz="2600" dirty="0"/>
           </a:p>
@@ -4079,25 +4065,16 @@
         </p:nvSpPr>
         <p:spPr>
           <a:xfrm>
-            <a:off x="457200" y="1325880"/>
-            <a:ext cx="8229600" cy="1517904"/>
-          </a:xfrm>
-          <a:prstGeom prst="roundRect">
-            <a:avLst>
-              <a:gd name="adj" fmla="val 4819"/>
-            </a:avLst>
+            <a:off x="502920" y="1325880"/>
+            <a:ext cx="384048" cy="384048"/>
+          </a:xfrm>
+          <a:prstGeom prst="ellipse">
+            <a:avLst/>
           </a:prstGeom>
           <a:solidFill>
-            <a:srgbClr val="F1F5F9"/>
+            <a:srgbClr val="E35205"/>
           </a:solidFill>
           <a:ln/>
-          <a:effectLst>
-            <a:outerShdw sx="100000" sy="100000" kx="0" ky="0" algn="bl" rotWithShape="0" blurRad="76200" dist="25400" dir="5400000">
-              <a:srgbClr val="000000">
-                <a:alpha val="12000"/>
-              </a:srgbClr>
-            </a:outerShdw>
-          </a:effectLst>
         </p:spPr>
       </p:sp>
       <p:sp>
@@ -4108,8 +4085,8 @@
         </p:nvSpPr>
         <p:spPr>
           <a:xfrm>
-            <a:off x="731520" y="1435608"/>
-            <a:ext cx="7680960" cy="1298448"/>
+            <a:off x="502920" y="1325880"/>
+            <a:ext cx="384048" cy="384048"/>
           </a:xfrm>
           <a:prstGeom prst="rect">
             <a:avLst/>
@@ -4118,18 +4095,55 @@
           <a:ln/>
         </p:spPr>
         <p:txBody>
-          <a:bodyPr wrap="square" lIns="0" tIns="0" rIns="0" bIns="0" rtlCol="0" anchor="t"/>
-          <a:lstStyle/>
-          <a:p>
-            <a:pPr marL="342900" indent="-342900">
-              <a:spcAft>
-                <a:spcPts val="600"/>
-              </a:spcAft>
-              <a:buSzPct val="100000"/>
-              <a:buChar char="•"/>
-            </a:pPr>
-            <a:r>
-              <a:rPr lang="en-US" sz="1400" dirty="0">
+          <a:bodyPr wrap="square" lIns="0" tIns="0" rIns="0" bIns="0" rtlCol="0" anchor="ctr"/>
+          <a:lstStyle/>
+          <a:p>
+            <a:pPr algn="ctr" indent="0" marL="0">
+              <a:buNone/>
+            </a:pPr>
+            <a:r>
+              <a:rPr lang="en-US" sz="1500" b="1" dirty="0">
+                <a:solidFill>
+                  <a:srgbClr val="0E1726"/>
+                </a:solidFill>
+                <a:latin typeface="Arial" pitchFamily="34" charset="0"/>
+                <a:ea typeface="Arial" pitchFamily="34" charset="-122"/>
+                <a:cs typeface="Arial" pitchFamily="34" charset="-120"/>
+              </a:rPr>
+              <a:t>4</a:t>
+            </a:r>
+            <a:endParaRPr lang="en-US" sz="1500" dirty="0"/>
+          </a:p>
+        </p:txBody>
+      </p:sp>
+      <p:sp>
+        <p:nvSpPr>
+          <p:cNvPr id="7" name="Text 4"/>
+          <p:cNvSpPr/>
+          <p:nvPr/>
+        </p:nvSpPr>
+        <p:spPr>
+          <a:xfrm>
+            <a:off x="1051560" y="1325880"/>
+            <a:ext cx="7589520" cy="658368"/>
+          </a:xfrm>
+          <a:prstGeom prst="rect">
+            <a:avLst/>
+          </a:prstGeom>
+          <a:noFill/>
+          <a:ln/>
+        </p:spPr>
+        <p:txBody>
+          <a:bodyPr wrap="square" lIns="0" tIns="0" rIns="0" bIns="0" rtlCol="0" anchor="ctr">
+            <a:normAutofit/>
+          </a:bodyPr>
+          <a:lstStyle/>
+          <a:p>
+            <a:pPr indent="0" marL="0">
+              <a:buNone/>
+            </a:pPr>
+            <a:r>
+              <a:rPr lang="en-US" sz="1350" dirty="0">
                 <a:solidFill>
                   <a:srgbClr val="1F2937"/>
                 </a:solidFill>
@@ -4137,108 +4151,45 @@
                 <a:ea typeface="Calibri" pitchFamily="34" charset="-122"/>
                 <a:cs typeface="Calibri" pitchFamily="34" charset="-120"/>
               </a:rPr>
-              <a:t>Each XSS type with payload + context</a:t>
-            </a:r>
-            <a:endParaRPr lang="en-US" sz="1400" dirty="0"/>
-          </a:p>
-          <a:p>
-            <a:pPr marL="342900" indent="-342900">
-              <a:spcAft>
-                <a:spcPts val="600"/>
-              </a:spcAft>
-              <a:buSzPct val="100000"/>
-              <a:buChar char="•"/>
-            </a:pPr>
-            <a:r>
-              <a:rPr lang="en-US" sz="1400" dirty="0">
-                <a:solidFill>
-                  <a:srgbClr val="1F2937"/>
+              <a:t>Demonstrate CSRF still succeeds against fixed_app.py — explain why SameSite didn't stop it</a:t>
+            </a:r>
+            <a:endParaRPr lang="en-US" sz="1350" dirty="0"/>
+          </a:p>
+        </p:txBody>
+      </p:sp>
+      <p:sp>
+        <p:nvSpPr>
+          <p:cNvPr id="8" name="Text 5"/>
+          <p:cNvSpPr/>
+          <p:nvPr/>
+        </p:nvSpPr>
+        <p:spPr>
+          <a:xfrm>
+            <a:off x="457200" y="4800600"/>
+            <a:ext cx="6949440" cy="274320"/>
+          </a:xfrm>
+          <a:prstGeom prst="rect">
+            <a:avLst/>
+          </a:prstGeom>
+          <a:noFill/>
+          <a:ln/>
+        </p:spPr>
+        <p:txBody>
+          <a:bodyPr wrap="square" lIns="0" tIns="0" rIns="0" bIns="0" rtlCol="0" anchor="ctr"/>
+          <a:lstStyle/>
+          <a:p>
+            <a:pPr indent="0" marL="0">
+              <a:buNone/>
+            </a:pPr>
+            <a:r>
+              <a:rPr lang="en-US" sz="900" dirty="0">
+                <a:solidFill>
+                  <a:srgbClr val="64748B"/>
                 </a:solidFill>
                 <a:latin typeface="Calibri" pitchFamily="34" charset="0"/>
                 <a:ea typeface="Calibri" pitchFamily="34" charset="-122"/>
                 <a:cs typeface="Calibri" pitchFamily="34" charset="-120"/>
               </a:rPr>
-              <a:t>CSP + escaping that blocks them (show before/after)</a:t>
-            </a:r>
-            <a:endParaRPr lang="en-US" sz="1400" dirty="0"/>
-          </a:p>
-          <a:p>
-            <a:pPr marL="342900" indent="-342900">
-              <a:spcAft>
-                <a:spcPts val="600"/>
-              </a:spcAft>
-              <a:buSzPct val="100000"/>
-              <a:buChar char="•"/>
-            </a:pPr>
-            <a:r>
-              <a:rPr lang="en-US" sz="1400" dirty="0">
-                <a:solidFill>
-                  <a:srgbClr val="1F2937"/>
-                </a:solidFill>
-                <a:latin typeface="Calibri" pitchFamily="34" charset="0"/>
-                <a:ea typeface="Calibri" pitchFamily="34" charset="-122"/>
-                <a:cs typeface="Calibri" pitchFamily="34" charset="-120"/>
-              </a:rPr>
-              <a:t>Short note: why SameSite + tokens stop CSRF</a:t>
-            </a:r>
-            <a:endParaRPr lang="en-US" sz="1400" dirty="0"/>
-          </a:p>
-          <a:p>
-            <a:pPr marL="342900" indent="-342900">
-              <a:spcAft>
-                <a:spcPts val="600"/>
-              </a:spcAft>
-              <a:buSzPct val="100000"/>
-              <a:buChar char="•"/>
-            </a:pPr>
-            <a:r>
-              <a:rPr lang="en-US" sz="1400" dirty="0">
-                <a:solidFill>
-                  <a:srgbClr val="1F2937"/>
-                </a:solidFill>
-                <a:latin typeface="Calibri" pitchFamily="34" charset="0"/>
-                <a:ea typeface="Calibri" pitchFamily="34" charset="-122"/>
-                <a:cs typeface="Calibri" pitchFamily="34" charset="-120"/>
-              </a:rPr>
-              <a:t>+ Audit the AI / EiPE / Prompt Problem (see worksheet)</a:t>
-            </a:r>
-            <a:endParaRPr lang="en-US" sz="1400" dirty="0"/>
-          </a:p>
-        </p:txBody>
-      </p:sp>
-      <p:sp>
-        <p:nvSpPr>
-          <p:cNvPr id="7" name="Text 4"/>
-          <p:cNvSpPr/>
-          <p:nvPr/>
-        </p:nvSpPr>
-        <p:spPr>
-          <a:xfrm>
-            <a:off x="457200" y="4800600"/>
-            <a:ext cx="6949440" cy="274320"/>
-          </a:xfrm>
-          <a:prstGeom prst="rect">
-            <a:avLst/>
-          </a:prstGeom>
-          <a:noFill/>
-          <a:ln/>
-        </p:spPr>
-        <p:txBody>
-          <a:bodyPr wrap="square" lIns="0" tIns="0" rIns="0" bIns="0" rtlCol="0" anchor="ctr"/>
-          <a:lstStyle/>
-          <a:p>
-            <a:pPr indent="0" marL="0">
-              <a:buNone/>
-            </a:pPr>
-            <a:r>
-              <a:rPr lang="en-US" sz="900" dirty="0">
-                <a:solidFill>
-                  <a:srgbClr val="64748B"/>
-                </a:solidFill>
-                <a:latin typeface="Calibri" pitchFamily="34" charset="0"/>
-                <a:ea typeface="Calibri" pitchFamily="34" charset="-122"/>
-                <a:cs typeface="Calibri" pitchFamily="34" charset="-120"/>
-              </a:rPr>
               <a:t>Software Security · Week 5</a:t>
             </a:r>
             <a:endParaRPr lang="en-US" sz="900" dirty="0"/>
@@ -4247,7 +4198,7 @@
       </p:sp>
       <p:pic>
         <p:nvPicPr>
-          <p:cNvPr id="8" name="Image 1" descr="/Users/pop7/Library/CloudStorage/OneDrive-MonsterConnectCo.,Ltd/Lecture/KOSEN69 - software-security/slides/pptx/assets/logo-small.png">    </p:cNvPr>
+          <p:cNvPr id="9" name="Image 1" descr="/Users/pop7/Library/CloudStorage/OneDrive-MonsterConnectCo.,Ltd/Lecture/KOSEN69 - software-security/slides/pptx/assets/logo-small.png">    </p:cNvPr>
           <p:cNvPicPr>
             <a:picLocks noChangeAspect="1"/>
           </p:cNvPicPr>
@@ -4385,7 +4336,7 @@
                 <a:ea typeface="Arial" pitchFamily="34" charset="-122"/>
                 <a:cs typeface="Arial" pitchFamily="34" charset="-120"/>
               </a:rPr>
-              <a:t>Key takeaways</a:t>
+              <a:t>Deliverable</a:t>
             </a:r>
             <a:endParaRPr lang="en-US" sz="2600" dirty="0"/>
           </a:p>
@@ -4400,11 +4351,11 @@
         <p:spPr>
           <a:xfrm>
             <a:off x="457200" y="1325880"/>
-            <a:ext cx="8229600" cy="1207008"/>
+            <a:ext cx="8229600" cy="1719072"/>
           </a:xfrm>
           <a:prstGeom prst="roundRect">
             <a:avLst>
-              <a:gd name="adj" fmla="val 6061"/>
+              <a:gd name="adj" fmla="val 4255"/>
             </a:avLst>
           </a:prstGeom>
           <a:solidFill>
@@ -4429,7 +4380,7 @@
         <p:spPr>
           <a:xfrm>
             <a:off x="731520" y="1435608"/>
-            <a:ext cx="7680960" cy="987552"/>
+            <a:ext cx="7680960" cy="1499616"/>
           </a:xfrm>
           <a:prstGeom prst="rect">
             <a:avLst/>
@@ -4438,7 +4389,9 @@
           <a:ln/>
         </p:spPr>
         <p:txBody>
-          <a:bodyPr wrap="square" lIns="0" tIns="0" rIns="0" bIns="0" rtlCol="0" anchor="t"/>
+          <a:bodyPr wrap="square" lIns="0" tIns="0" rIns="0" bIns="0" rtlCol="0" anchor="t">
+            <a:normAutofit/>
+          </a:bodyPr>
           <a:lstStyle/>
           <a:p>
             <a:pPr marL="342900" indent="-342900">
@@ -4457,7 +4410,7 @@
                 <a:ea typeface="Calibri" pitchFamily="34" charset="-122"/>
                 <a:cs typeface="Calibri" pitchFamily="34" charset="-120"/>
               </a:rPr>
-              <a:t>XSS is injection on the output side — encode for the context</a:t>
+              <a:t>Each XSS type with payload + context</a:t>
             </a:r>
             <a:endParaRPr lang="en-US" sz="1400" dirty="0"/>
           </a:p>
@@ -4478,7 +4431,7 @@
                 <a:ea typeface="Calibri" pitchFamily="34" charset="-122"/>
                 <a:cs typeface="Calibri" pitchFamily="34" charset="-120"/>
               </a:rPr>
-              <a:t>CSP is defense-in-depth, not a substitute for encoding</a:t>
+              <a:t>Escaping + CSP that blocks them (show before/after)</a:t>
             </a:r>
             <a:endParaRPr lang="en-US" sz="1400" dirty="0"/>
           </a:p>
@@ -4499,7 +4452,28 @@
                 <a:ea typeface="Calibri" pitchFamily="34" charset="-122"/>
                 <a:cs typeface="Calibri" pitchFamily="34" charset="-120"/>
               </a:rPr>
-              <a:t>SameSite cookies kill most CSRF</a:t>
+              <a:t>Short note: why CSRF still succeeds against fixed_app.py despite SameSite=Strict</a:t>
+            </a:r>
+            <a:endParaRPr lang="en-US" sz="1400" dirty="0"/>
+          </a:p>
+          <a:p>
+            <a:pPr marL="342900" indent="-342900">
+              <a:spcAft>
+                <a:spcPts val="600"/>
+              </a:spcAft>
+              <a:buSzPct val="100000"/>
+              <a:buChar char="•"/>
+            </a:pPr>
+            <a:r>
+              <a:rPr lang="en-US" sz="1400" dirty="0">
+                <a:solidFill>
+                  <a:srgbClr val="1F2937"/>
+                </a:solidFill>
+                <a:latin typeface="Calibri" pitchFamily="34" charset="0"/>
+                <a:ea typeface="Calibri" pitchFamily="34" charset="-122"/>
+                <a:cs typeface="Calibri" pitchFamily="34" charset="-120"/>
+              </a:rPr>
+              <a:t>+ Audit the AI / EiPE / Prompt Problem (see worksheet)</a:t>
             </a:r>
             <a:endParaRPr lang="en-US" sz="1400" dirty="0"/>
           </a:p>
@@ -4602,6 +4576,307 @@
       </p:grpSpPr>
       <p:sp>
         <p:nvSpPr>
+          <p:cNvPr id="2" name="Shape 0"/>
+          <p:cNvSpPr/>
+          <p:nvPr/>
+        </p:nvSpPr>
+        <p:spPr>
+          <a:xfrm>
+            <a:off x="457200" y="384048"/>
+            <a:ext cx="530352" cy="530352"/>
+          </a:xfrm>
+          <a:prstGeom prst="ellipse">
+            <a:avLst/>
+          </a:prstGeom>
+          <a:solidFill>
+            <a:srgbClr val="E35205"/>
+          </a:solidFill>
+          <a:ln/>
+          <a:effectLst>
+            <a:outerShdw sx="100000" sy="100000" kx="0" ky="0" algn="bl" rotWithShape="0" blurRad="76200" dist="25400" dir="5400000">
+              <a:srgbClr val="000000">
+                <a:alpha val="12000"/>
+              </a:srgbClr>
+            </a:outerShdw>
+          </a:effectLst>
+        </p:spPr>
+      </p:sp>
+      <p:pic>
+        <p:nvPicPr>
+          <p:cNvPr id="3" name="Image 0" descr="preencoded.png">    </p:cNvPr>
+          <p:cNvPicPr>
+            <a:picLocks noChangeAspect="1"/>
+          </p:cNvPicPr>
+          <p:nvPr/>
+        </p:nvPicPr>
+        <p:blipFill>
+          <a:blip r:embed="rId1"/>
+          <a:stretch>
+            <a:fillRect/>
+          </a:stretch>
+        </p:blipFill>
+        <p:spPr>
+          <a:xfrm>
+            <a:off x="594360" y="521208"/>
+            <a:ext cx="256032" cy="256032"/>
+          </a:xfrm>
+          <a:prstGeom prst="rect">
+            <a:avLst/>
+          </a:prstGeom>
+        </p:spPr>
+      </p:pic>
+      <p:sp>
+        <p:nvSpPr>
+          <p:cNvPr id="4" name="Text 1"/>
+          <p:cNvSpPr/>
+          <p:nvPr/>
+        </p:nvSpPr>
+        <p:spPr>
+          <a:xfrm>
+            <a:off x="1143000" y="329184"/>
+            <a:ext cx="7498080" cy="603504"/>
+          </a:xfrm>
+          <a:prstGeom prst="rect">
+            <a:avLst/>
+          </a:prstGeom>
+          <a:noFill/>
+          <a:ln/>
+        </p:spPr>
+        <p:txBody>
+          <a:bodyPr wrap="square" lIns="0" tIns="0" rIns="0" bIns="0" rtlCol="0" anchor="ctr"/>
+          <a:lstStyle/>
+          <a:p>
+            <a:pPr indent="0" marL="0">
+              <a:buNone/>
+            </a:pPr>
+            <a:r>
+              <a:rPr lang="en-US" sz="2600" b="1" dirty="0">
+                <a:solidFill>
+                  <a:srgbClr val="1F2937"/>
+                </a:solidFill>
+                <a:latin typeface="Arial" pitchFamily="34" charset="0"/>
+                <a:ea typeface="Arial" pitchFamily="34" charset="-122"/>
+                <a:cs typeface="Arial" pitchFamily="34" charset="-120"/>
+              </a:rPr>
+              <a:t>Key takeaways</a:t>
+            </a:r>
+            <a:endParaRPr lang="en-US" sz="2600" dirty="0"/>
+          </a:p>
+        </p:txBody>
+      </p:sp>
+      <p:sp>
+        <p:nvSpPr>
+          <p:cNvPr id="5" name="Shape 2"/>
+          <p:cNvSpPr/>
+          <p:nvPr/>
+        </p:nvSpPr>
+        <p:spPr>
+          <a:xfrm>
+            <a:off x="457200" y="1325880"/>
+            <a:ext cx="8229600" cy="1408176"/>
+          </a:xfrm>
+          <a:prstGeom prst="roundRect">
+            <a:avLst>
+              <a:gd name="adj" fmla="val 5195"/>
+            </a:avLst>
+          </a:prstGeom>
+          <a:solidFill>
+            <a:srgbClr val="F1F5F9"/>
+          </a:solidFill>
+          <a:ln/>
+          <a:effectLst>
+            <a:outerShdw sx="100000" sy="100000" kx="0" ky="0" algn="bl" rotWithShape="0" blurRad="76200" dist="25400" dir="5400000">
+              <a:srgbClr val="000000">
+                <a:alpha val="12000"/>
+              </a:srgbClr>
+            </a:outerShdw>
+          </a:effectLst>
+        </p:spPr>
+      </p:sp>
+      <p:sp>
+        <p:nvSpPr>
+          <p:cNvPr id="6" name="Text 3"/>
+          <p:cNvSpPr/>
+          <p:nvPr/>
+        </p:nvSpPr>
+        <p:spPr>
+          <a:xfrm>
+            <a:off x="731520" y="1435608"/>
+            <a:ext cx="7680960" cy="1188720"/>
+          </a:xfrm>
+          <a:prstGeom prst="rect">
+            <a:avLst/>
+          </a:prstGeom>
+          <a:noFill/>
+          <a:ln/>
+        </p:spPr>
+        <p:txBody>
+          <a:bodyPr wrap="square" lIns="0" tIns="0" rIns="0" bIns="0" rtlCol="0" anchor="t">
+            <a:normAutofit/>
+          </a:bodyPr>
+          <a:lstStyle/>
+          <a:p>
+            <a:pPr marL="342900" indent="-342900">
+              <a:spcAft>
+                <a:spcPts val="600"/>
+              </a:spcAft>
+              <a:buSzPct val="100000"/>
+              <a:buChar char="•"/>
+            </a:pPr>
+            <a:r>
+              <a:rPr lang="en-US" sz="1400" dirty="0">
+                <a:solidFill>
+                  <a:srgbClr val="1F2937"/>
+                </a:solidFill>
+                <a:latin typeface="Calibri" pitchFamily="34" charset="0"/>
+                <a:ea typeface="Calibri" pitchFamily="34" charset="-122"/>
+                <a:cs typeface="Calibri" pitchFamily="34" charset="-120"/>
+              </a:rPr>
+              <a:t>XSS is injection on the output side — encode for the context</a:t>
+            </a:r>
+            <a:endParaRPr lang="en-US" sz="1400" dirty="0"/>
+          </a:p>
+          <a:p>
+            <a:pPr marL="342900" indent="-342900">
+              <a:spcAft>
+                <a:spcPts val="600"/>
+              </a:spcAft>
+              <a:buSzPct val="100000"/>
+              <a:buChar char="•"/>
+            </a:pPr>
+            <a:r>
+              <a:rPr lang="en-US" sz="1400" dirty="0">
+                <a:solidFill>
+                  <a:srgbClr val="1F2937"/>
+                </a:solidFill>
+                <a:latin typeface="Calibri" pitchFamily="34" charset="0"/>
+                <a:ea typeface="Calibri" pitchFamily="34" charset="-122"/>
+                <a:cs typeface="Calibri" pitchFamily="34" charset="-120"/>
+              </a:rPr>
+              <a:t>CSP is defense-in-depth, not a substitute for encoding</a:t>
+            </a:r>
+            <a:endParaRPr lang="en-US" sz="1400" dirty="0"/>
+          </a:p>
+          <a:p>
+            <a:pPr marL="342900" indent="-342900">
+              <a:spcAft>
+                <a:spcPts val="600"/>
+              </a:spcAft>
+              <a:buSzPct val="100000"/>
+              <a:buChar char="•"/>
+            </a:pPr>
+            <a:r>
+              <a:rPr lang="en-US" sz="1400" dirty="0">
+                <a:solidFill>
+                  <a:srgbClr val="1F2937"/>
+                </a:solidFill>
+                <a:latin typeface="Calibri" pitchFamily="34" charset="0"/>
+                <a:ea typeface="Calibri" pitchFamily="34" charset="-122"/>
+                <a:cs typeface="Calibri" pitchFamily="34" charset="-120"/>
+              </a:rPr>
+              <a:t>SameSite cookies stop the cookie attaching cross-site — they don't stop a request being accepted if the endpoint never checks authorization</a:t>
+            </a:r>
+            <a:endParaRPr lang="en-US" sz="1400" dirty="0"/>
+          </a:p>
+        </p:txBody>
+      </p:sp>
+      <p:sp>
+        <p:nvSpPr>
+          <p:cNvPr id="7" name="Text 4"/>
+          <p:cNvSpPr/>
+          <p:nvPr/>
+        </p:nvSpPr>
+        <p:spPr>
+          <a:xfrm>
+            <a:off x="457200" y="4800600"/>
+            <a:ext cx="6949440" cy="274320"/>
+          </a:xfrm>
+          <a:prstGeom prst="rect">
+            <a:avLst/>
+          </a:prstGeom>
+          <a:noFill/>
+          <a:ln/>
+        </p:spPr>
+        <p:txBody>
+          <a:bodyPr wrap="square" lIns="0" tIns="0" rIns="0" bIns="0" rtlCol="0" anchor="ctr"/>
+          <a:lstStyle/>
+          <a:p>
+            <a:pPr indent="0" marL="0">
+              <a:buNone/>
+            </a:pPr>
+            <a:r>
+              <a:rPr lang="en-US" sz="900" dirty="0">
+                <a:solidFill>
+                  <a:srgbClr val="64748B"/>
+                </a:solidFill>
+                <a:latin typeface="Calibri" pitchFamily="34" charset="0"/>
+                <a:ea typeface="Calibri" pitchFamily="34" charset="-122"/>
+                <a:cs typeface="Calibri" pitchFamily="34" charset="-120"/>
+              </a:rPr>
+              <a:t>Software Security · Week 5</a:t>
+            </a:r>
+            <a:endParaRPr lang="en-US" sz="900" dirty="0"/>
+          </a:p>
+        </p:txBody>
+      </p:sp>
+      <p:pic>
+        <p:nvPicPr>
+          <p:cNvPr id="8" name="Image 1" descr="/Users/pop7/Library/CloudStorage/OneDrive-MonsterConnectCo.,Ltd/Lecture/KOSEN69 - software-security/slides/pptx/assets/logo-small.png">    </p:cNvPr>
+          <p:cNvPicPr>
+            <a:picLocks noChangeAspect="1"/>
+          </p:cNvPicPr>
+          <p:nvPr/>
+        </p:nvPicPr>
+        <p:blipFill>
+          <a:blip r:embed="rId2"/>
+          <a:stretch>
+            <a:fillRect/>
+          </a:stretch>
+        </p:blipFill>
+        <p:spPr>
+          <a:xfrm>
+            <a:off x="7882128" y="4700016"/>
+            <a:ext cx="768096" cy="356616"/>
+          </a:xfrm>
+          <a:prstGeom prst="rect">
+            <a:avLst/>
+          </a:prstGeom>
+        </p:spPr>
+      </p:pic>
+    </p:spTree>
+  </p:cSld>
+  <p:clrMapOvr>
+    <a:masterClrMapping/>
+  </p:clrMapOvr>
+</p:sld>
+</file>
+
+<file path=ppt/slides/slide17.xml><?xml version="1.0" encoding="utf-8"?>
+<p:sld xmlns:a="http://schemas.openxmlformats.org/drawingml/2006/main" xmlns:r="http://schemas.openxmlformats.org/officeDocument/2006/relationships" xmlns:p="http://schemas.openxmlformats.org/presentationml/2006/main">
+  <p:cSld name="Slide 17">
+    <p:bg>
+      <p:bgPr>
+        <a:solidFill>
+          <a:srgbClr val="FFFFFF"/>
+        </a:solidFill>
+      </p:bgPr>
+    </p:bg>
+    <p:spTree>
+      <p:nvGrpSpPr>
+        <p:cNvPr id="1" name=""/>
+        <p:cNvGrpSpPr/>
+        <p:nvPr/>
+      </p:nvGrpSpPr>
+      <p:grpSpPr>
+        <a:xfrm>
+          <a:off x="0" y="0"/>
+          <a:ext cx="0" cy="0"/>
+          <a:chOff x="0" y="0"/>
+          <a:chExt cx="0" cy="0"/>
+        </a:xfrm>
+      </p:grpSpPr>
+      <p:sp>
+        <p:nvSpPr>
           <p:cNvPr id="2" name="Text 0"/>
           <p:cNvSpPr/>
           <p:nvPr/>
@@ -4871,7 +5146,9 @@
           <a:ln/>
         </p:spPr>
         <p:txBody>
-          <a:bodyPr wrap="square" lIns="0" tIns="0" rIns="0" bIns="0" rtlCol="0" anchor="t"/>
+          <a:bodyPr wrap="square" lIns="0" tIns="0" rIns="0" bIns="0" rtlCol="0" anchor="t">
+            <a:normAutofit/>
+          </a:bodyPr>
           <a:lstStyle/>
           <a:p>
             <a:pPr marL="342900" indent="-342900">
@@ -5212,7 +5489,9 @@
           <a:ln/>
         </p:spPr>
         <p:txBody>
-          <a:bodyPr wrap="square" lIns="0" tIns="0" rIns="0" bIns="0" rtlCol="0" anchor="t"/>
+          <a:bodyPr wrap="square" lIns="0" tIns="0" rIns="0" bIns="0" rtlCol="0" anchor="t">
+            <a:normAutofit/>
+          </a:bodyPr>
           <a:lstStyle/>
           <a:p>
             <a:pPr marL="342900" indent="-342900">
@@ -5511,7 +5790,9 @@
           <a:ln/>
         </p:spPr>
         <p:txBody>
-          <a:bodyPr wrap="square" lIns="0" tIns="0" rIns="0" bIns="0" rtlCol="0" anchor="t"/>
+          <a:bodyPr wrap="square" lIns="0" tIns="0" rIns="0" bIns="0" rtlCol="0" anchor="t">
+            <a:normAutofit/>
+          </a:bodyPr>
           <a:lstStyle/>
           <a:p>
             <a:pPr marL="342900" indent="-342900">
@@ -5803,7 +6084,9 @@
           <a:ln/>
         </p:spPr>
         <p:txBody>
-          <a:bodyPr wrap="square" lIns="0" tIns="0" rIns="0" bIns="0" rtlCol="0" anchor="ctr"/>
+          <a:bodyPr wrap="square" lIns="0" tIns="0" rIns="0" bIns="0" rtlCol="0" anchor="ctr">
+            <a:normAutofit/>
+          </a:bodyPr>
           <a:lstStyle/>
           <a:p>
             <a:pPr indent="0" marL="0">
@@ -5871,7 +6154,9 @@
           <a:ln/>
         </p:spPr>
         <p:txBody>
-          <a:bodyPr wrap="square" lIns="0" tIns="0" rIns="0" bIns="0" rtlCol="0" anchor="t"/>
+          <a:bodyPr wrap="square" lIns="0" tIns="0" rIns="0" bIns="0" rtlCol="0" anchor="t">
+            <a:normAutofit/>
+          </a:bodyPr>
           <a:lstStyle/>
           <a:p>
             <a:pPr marL="342900" indent="-342900">
@@ -6630,14 +6915,43 @@
       </p:graphicFrame>
       <p:sp>
         <p:nvSpPr>
-          <p:cNvPr id="6" name="Text 2"/>
-          <p:cNvSpPr/>
-          <p:nvPr/>
-        </p:nvSpPr>
-        <p:spPr>
-          <a:xfrm>
-            <a:off x="457200" y="4800600"/>
-            <a:ext cx="6949440" cy="274320"/>
+          <p:cNvPr id="6" name="Shape 2"/>
+          <p:cNvSpPr/>
+          <p:nvPr/>
+        </p:nvSpPr>
+        <p:spPr>
+          <a:xfrm>
+            <a:off x="457200" y="3191256"/>
+            <a:ext cx="8229600" cy="786384"/>
+          </a:xfrm>
+          <a:prstGeom prst="roundRect">
+            <a:avLst>
+              <a:gd name="adj" fmla="val 9302"/>
+            </a:avLst>
+          </a:prstGeom>
+          <a:solidFill>
+            <a:srgbClr val="F1F5F9"/>
+          </a:solidFill>
+          <a:ln/>
+          <a:effectLst>
+            <a:outerShdw sx="100000" sy="100000" kx="0" ky="0" algn="bl" rotWithShape="0" blurRad="76200" dist="25400" dir="5400000">
+              <a:srgbClr val="000000">
+                <a:alpha val="12000"/>
+              </a:srgbClr>
+            </a:outerShdw>
+          </a:effectLst>
+        </p:spPr>
+      </p:sp>
+      <p:sp>
+        <p:nvSpPr>
+          <p:cNvPr id="7" name="Text 3"/>
+          <p:cNvSpPr/>
+          <p:nvPr/>
+        </p:nvSpPr>
+        <p:spPr>
+          <a:xfrm>
+            <a:off x="731520" y="3300984"/>
+            <a:ext cx="7680960" cy="566928"/>
           </a:xfrm>
           <a:prstGeom prst="rect">
             <a:avLst/>
@@ -6646,21 +6960,66 @@
           <a:ln/>
         </p:spPr>
         <p:txBody>
-          <a:bodyPr wrap="square" lIns="0" tIns="0" rIns="0" bIns="0" rtlCol="0" anchor="ctr"/>
-          <a:lstStyle/>
-          <a:p>
-            <a:pPr indent="0" marL="0">
-              <a:buNone/>
-            </a:pPr>
-            <a:r>
-              <a:rPr lang="en-US" sz="900" dirty="0">
-                <a:solidFill>
-                  <a:srgbClr val="64748B"/>
+          <a:bodyPr wrap="square" lIns="0" tIns="0" rIns="0" bIns="0" rtlCol="0" anchor="t">
+            <a:normAutofit/>
+          </a:bodyPr>
+          <a:lstStyle/>
+          <a:p>
+            <a:pPr marL="342900" indent="-342900">
+              <a:spcAft>
+                <a:spcPts val="600"/>
+              </a:spcAft>
+              <a:buSzPct val="100000"/>
+              <a:buChar char="•"/>
+            </a:pPr>
+            <a:r>
+              <a:rPr lang="en-US" sz="1400" dirty="0">
+                <a:solidFill>
+                  <a:srgbClr val="1F2937"/>
                 </a:solidFill>
                 <a:latin typeface="Calibri" pitchFamily="34" charset="0"/>
                 <a:ea typeface="Calibri" pitchFamily="34" charset="-122"/>
                 <a:cs typeface="Calibri" pitchFamily="34" charset="-120"/>
               </a:rPr>
+              <a:t>Today's graded app (vulnerable_app.py) implements reflected + stored only; DOM XSS is optional, via the ungraded Juice Shop target</a:t>
+            </a:r>
+            <a:endParaRPr lang="en-US" sz="1400" dirty="0"/>
+          </a:p>
+        </p:txBody>
+      </p:sp>
+      <p:sp>
+        <p:nvSpPr>
+          <p:cNvPr id="8" name="Text 4"/>
+          <p:cNvSpPr/>
+          <p:nvPr/>
+        </p:nvSpPr>
+        <p:spPr>
+          <a:xfrm>
+            <a:off x="457200" y="4800600"/>
+            <a:ext cx="6949440" cy="274320"/>
+          </a:xfrm>
+          <a:prstGeom prst="rect">
+            <a:avLst/>
+          </a:prstGeom>
+          <a:noFill/>
+          <a:ln/>
+        </p:spPr>
+        <p:txBody>
+          <a:bodyPr wrap="square" lIns="0" tIns="0" rIns="0" bIns="0" rtlCol="0" anchor="ctr"/>
+          <a:lstStyle/>
+          <a:p>
+            <a:pPr indent="0" marL="0">
+              <a:buNone/>
+            </a:pPr>
+            <a:r>
+              <a:rPr lang="en-US" sz="900" dirty="0">
+                <a:solidFill>
+                  <a:srgbClr val="64748B"/>
+                </a:solidFill>
+                <a:latin typeface="Calibri" pitchFamily="34" charset="0"/>
+                <a:ea typeface="Calibri" pitchFamily="34" charset="-122"/>
+                <a:cs typeface="Calibri" pitchFamily="34" charset="-120"/>
+              </a:rPr>
               <a:t>Software Security · Week 5</a:t>
             </a:r>
             <a:endParaRPr lang="en-US" sz="900" dirty="0"/>
@@ -6669,7 +7028,7 @@
       </p:sp>
       <p:pic>
         <p:nvPicPr>
-          <p:cNvPr id="7" name="Image 1" descr="/Users/pop7/Library/CloudStorage/OneDrive-MonsterConnectCo.,Ltd/Lecture/KOSEN69 - software-security/slides/pptx/assets/logo-small.png">    </p:cNvPr>
+          <p:cNvPr id="9" name="Image 1" descr="/Users/pop7/Library/CloudStorage/OneDrive-MonsterConnectCo.,Ltd/Lecture/KOSEN69 - software-security/slides/pptx/assets/logo-small.png">    </p:cNvPr>
           <p:cNvPicPr>
             <a:picLocks noChangeAspect="1"/>
           </p:cNvPicPr>
@@ -6822,11 +7181,11 @@
         <p:spPr>
           <a:xfrm>
             <a:off x="457200" y="1325880"/>
-            <a:ext cx="8229600" cy="1042416"/>
+            <a:ext cx="8229600" cy="932688"/>
           </a:xfrm>
           <a:prstGeom prst="roundRect">
             <a:avLst>
-              <a:gd name="adj" fmla="val 5263"/>
+              <a:gd name="adj" fmla="val 5882"/>
             </a:avLst>
           </a:prstGeom>
           <a:solidFill>
@@ -6849,7 +7208,7 @@
         <p:spPr>
           <a:xfrm>
             <a:off x="640080" y="1399032"/>
-            <a:ext cx="7863840" cy="896112"/>
+            <a:ext cx="7863840" cy="786384"/>
           </a:xfrm>
           <a:prstGeom prst="rect">
             <a:avLst/>
@@ -6858,7 +7217,9 @@
           <a:ln/>
         </p:spPr>
         <p:txBody>
-          <a:bodyPr wrap="square" lIns="0" tIns="0" rIns="0" bIns="0" rtlCol="0" anchor="t"/>
+          <a:bodyPr wrap="square" lIns="0" tIns="0" rIns="0" bIns="0" rtlCol="0" anchor="t">
+            <a:normAutofit/>
+          </a:bodyPr>
           <a:lstStyle/>
           <a:p>
             <a:pPr indent="0" marL="0">
@@ -6921,12 +7282,12 @@
         </p:nvSpPr>
         <p:spPr>
           <a:xfrm>
-            <a:off x="457200" y="2532888"/>
-            <a:ext cx="8229600" cy="585216"/>
+            <a:off x="457200" y="2423160"/>
+            <a:ext cx="8229600" cy="1499616"/>
           </a:xfrm>
           <a:prstGeom prst="roundRect">
             <a:avLst>
-              <a:gd name="adj" fmla="val 12500"/>
+              <a:gd name="adj" fmla="val 4878"/>
             </a:avLst>
           </a:prstGeom>
           <a:solidFill>
@@ -6950,8 +7311,8 @@
         </p:nvSpPr>
         <p:spPr>
           <a:xfrm>
-            <a:off x="731520" y="2642616"/>
-            <a:ext cx="7680960" cy="365760"/>
+            <a:off x="731520" y="2532888"/>
+            <a:ext cx="7680960" cy="1280160"/>
           </a:xfrm>
           <a:prstGeom prst="rect">
             <a:avLst/>
@@ -6960,7 +7321,9 @@
           <a:ln/>
         </p:spPr>
         <p:txBody>
-          <a:bodyPr wrap="square" lIns="0" tIns="0" rIns="0" bIns="0" rtlCol="0" anchor="t"/>
+          <a:bodyPr wrap="square" lIns="0" tIns="0" rIns="0" bIns="0" rtlCol="0" anchor="t">
+            <a:normAutofit/>
+          </a:bodyPr>
           <a:lstStyle/>
           <a:p>
             <a:pPr marL="342900" indent="-342900">
@@ -6980,6 +7343,27 @@
                 <a:cs typeface="Calibri" pitchFamily="34" charset="-120"/>
               </a:rPr>
               <a:t>Context matters: HTML body vs attribute vs JS vs URL</a:t>
+            </a:r>
+            <a:endParaRPr lang="en-US" sz="1400" dirty="0"/>
+          </a:p>
+          <a:p>
+            <a:pPr marL="342900" indent="-342900">
+              <a:spcAft>
+                <a:spcPts val="600"/>
+              </a:spcAft>
+              <a:buSzPct val="100000"/>
+              <a:buChar char="•"/>
+            </a:pPr>
+            <a:r>
+              <a:rPr lang="en-US" sz="1400" dirty="0">
+                <a:solidFill>
+                  <a:srgbClr val="1F2937"/>
+                </a:solidFill>
+                <a:latin typeface="Calibri" pitchFamily="34" charset="0"/>
+                <a:ea typeface="Calibri" pitchFamily="34" charset="-122"/>
+                <a:cs typeface="Calibri" pitchFamily="34" charset="-120"/>
+              </a:rPr>
+              <a:t>vulnerable_app.py filters nothing — every payload here fires as-is; the &lt;img onerror&gt; form isn't "the one that sneaks past a filter," it's just 3 characters longer than &lt;script&gt;alert(1)&lt;/script&gt; (28 vs. 25) — a real golf trade-off, not a bypass technique</a:t>
             </a:r>
             <a:endParaRPr lang="en-US" sz="1400" dirty="0"/>
           </a:p>
@@ -7179,11 +7563,11 @@
         <p:spPr>
           <a:xfrm>
             <a:off x="457200" y="1325880"/>
-            <a:ext cx="8229600" cy="896112"/>
+            <a:ext cx="8229600" cy="1810512"/>
           </a:xfrm>
           <a:prstGeom prst="roundRect">
             <a:avLst>
-              <a:gd name="adj" fmla="val 8163"/>
+              <a:gd name="adj" fmla="val 4040"/>
             </a:avLst>
           </a:prstGeom>
           <a:solidFill>
@@ -7208,7 +7592,7 @@
         <p:spPr>
           <a:xfrm>
             <a:off x="731520" y="1435608"/>
-            <a:ext cx="7680960" cy="676656"/>
+            <a:ext cx="7680960" cy="1591056"/>
           </a:xfrm>
           <a:prstGeom prst="rect">
             <a:avLst/>
@@ -7217,7 +7601,9 @@
           <a:ln/>
         </p:spPr>
         <p:txBody>
-          <a:bodyPr wrap="square" lIns="0" tIns="0" rIns="0" bIns="0" rtlCol="0" anchor="t"/>
+          <a:bodyPr wrap="square" lIns="0" tIns="0" rIns="0" bIns="0" rtlCol="0" anchor="t">
+            <a:normAutofit/>
+          </a:bodyPr>
           <a:lstStyle/>
           <a:p>
             <a:pPr marL="342900" indent="-342900">
@@ -7257,7 +7643,28 @@
                 <a:ea typeface="Calibri" pitchFamily="34" charset="-122"/>
                 <a:cs typeface="Calibri" pitchFamily="34" charset="-120"/>
               </a:rPr>
-              <a:t>Defenses: anti-CSRF tokens, SameSite cookies, check Origin/Referer</a:t>
+              <a:t>Real defenses: anti-CSRF tokens, checking Origin/Referer, and the endpoint actually checking who's asking</a:t>
+            </a:r>
+            <a:endParaRPr lang="en-US" sz="1400" dirty="0"/>
+          </a:p>
+          <a:p>
+            <a:pPr marL="342900" indent="-342900">
+              <a:spcAft>
+                <a:spcPts val="600"/>
+              </a:spcAft>
+              <a:buSzPct val="100000"/>
+              <a:buChar char="•"/>
+            </a:pPr>
+            <a:r>
+              <a:rPr lang="en-US" sz="1400" dirty="0">
+                <a:solidFill>
+                  <a:srgbClr val="1F2937"/>
+                </a:solidFill>
+                <a:latin typeface="Calibri" pitchFamily="34" charset="0"/>
+                <a:ea typeface="Calibri" pitchFamily="34" charset="-122"/>
+                <a:cs typeface="Calibri" pitchFamily="34" charset="-120"/>
+              </a:rPr>
+              <a:t>SameSite=Strict alone stops the cookie from attaching cross-site — it does not stop a request from being accepted if the endpoint never checks authorization in the first place (today's lab proves this)</a:t>
             </a:r>
             <a:endParaRPr lang="en-US" sz="1400" dirty="0"/>
           </a:p>
@@ -7457,11 +7864,11 @@
         <p:spPr>
           <a:xfrm>
             <a:off x="457200" y="1325880"/>
-            <a:ext cx="8229600" cy="1207008"/>
+            <a:ext cx="8229600" cy="1408176"/>
           </a:xfrm>
           <a:prstGeom prst="roundRect">
             <a:avLst>
-              <a:gd name="adj" fmla="val 6061"/>
+              <a:gd name="adj" fmla="val 5195"/>
             </a:avLst>
           </a:prstGeom>
           <a:solidFill>
@@ -7486,7 +7893,7 @@
         <p:spPr>
           <a:xfrm>
             <a:off x="731520" y="1435608"/>
-            <a:ext cx="7680960" cy="987552"/>
+            <a:ext cx="7680960" cy="1188720"/>
           </a:xfrm>
           <a:prstGeom prst="rect">
             <a:avLst/>
@@ -7495,7 +7902,9 @@
           <a:ln/>
         </p:spPr>
         <p:txBody>
-          <a:bodyPr wrap="square" lIns="0" tIns="0" rIns="0" bIns="0" rtlCol="0" anchor="t"/>
+          <a:bodyPr wrap="square" lIns="0" tIns="0" rIns="0" bIns="0" rtlCol="0" anchor="t">
+            <a:normAutofit/>
+          </a:bodyPr>
           <a:lstStyle/>
           <a:p>
             <a:pPr marL="342900" indent="-342900">
@@ -7556,7 +7965,7 @@
                 <a:ea typeface="Calibri" pitchFamily="34" charset="-122"/>
                 <a:cs typeface="Calibri" pitchFamily="34" charset="-120"/>
               </a:rPr>
-              <a:t>400,000 customers affected; £183M ICO fine (later reduced)</a:t>
+              <a:t>~380k payment records skimmed; ICO proposed a £183M fine, finalized at £20M (2020, ~89% reduction)</a:t>
             </a:r>
             <a:endParaRPr lang="en-US" sz="1400" dirty="0"/>
           </a:p>
@@ -7570,7 +7979,7 @@
         </p:nvSpPr>
         <p:spPr>
           <a:xfrm>
-            <a:off x="457200" y="2697480"/>
+            <a:off x="457200" y="2898648"/>
             <a:ext cx="8229600" cy="822960"/>
           </a:xfrm>
           <a:prstGeom prst="roundRect">
@@ -7592,7 +8001,7 @@
         </p:nvSpPr>
         <p:spPr>
           <a:xfrm>
-            <a:off x="731520" y="2697480"/>
+            <a:off x="731520" y="2898648"/>
             <a:ext cx="7680960" cy="822960"/>
           </a:xfrm>
           <a:prstGeom prst="rect">
@@ -7602,7 +8011,9 @@
           <a:ln/>
         </p:spPr>
         <p:txBody>
-          <a:bodyPr wrap="square" lIns="0" tIns="0" rIns="0" bIns="0" rtlCol="0" anchor="ctr"/>
+          <a:bodyPr wrap="square" lIns="0" tIns="0" rIns="0" bIns="0" rtlCol="0" anchor="ctr">
+            <a:normAutofit/>
+          </a:bodyPr>
           <a:lstStyle/>
           <a:p>
             <a:pPr indent="0" marL="0">

--- a/slides/pptx/week05.pptx
+++ b/slides/pptx/week05.pptx
@@ -22,9 +22,11 @@
     <p:sldId id="270" r:id="rId16"/>
     <p:sldId id="271" r:id="rId17"/>
     <p:sldId id="272" r:id="rId18"/>
+    <p:sldId id="273" r:id="rId19"/>
+    <p:sldId id="274" r:id="rId20"/>
   </p:sldIdLst>
   <p:notesMasterIdLst>
-    <p:notesMasterId r:id="rId19"/>
+    <p:notesMasterId r:id="rId21"/>
   </p:notesMasterIdLst>
   <p:sldSz cx="9144000" cy="5143500"/>
   <p:notesSz cx="5143500" cy="9144000"/>
@@ -606,7 +608,7 @@
           <a:p>
             <a:r>
               <a:rPr lang="en-US" dirty="0"/>
-              <a:t>Quick reference for the worksheet — these three are what's graded this week. Clickjacking (CWE-1021) isn't part of this lab; don't cite it here. ~1 min.</a:t>
+              <a:t>The step-by-step version of the bullets just covered — walk both panels left to right once. Land on the footnote: fixed_app.py kills the XSS but the CSRF still works, because encoding an output and checking a token are two unrelated fixes. ~4 min.</a:t>
             </a:r>
             <a:endParaRPr lang="en-US" dirty="0"/>
           </a:p>
@@ -694,7 +696,7 @@
           <a:p>
             <a:r>
               <a:rPr lang="en-US" dirty="0"/>
-              <a:t>The payoff. #1: encode for the OUTPUT CONTEXT (the bug is on output). Modern frameworks auto-escape — the danger is when devs opt out (innerHTML). Be accurate about CSP here: this lab's escaping already neutralizes every payload before CSP would ever matter, so students will NOT see a CSP violation fire in the console today — it's set as a header, its blocking behavior is asserted, not demonstrated, in this sandbox. ~6 min.</a:t>
+              <a:t>Make it real. Magecart = the keylogging harm from 2 slides ago, at scale, on a Fortune-500 checkout. Note it often enters via a compromised third-party script — which motivates CSP next. ~3 min.</a:t>
             </a:r>
             <a:endParaRPr lang="en-US" dirty="0"/>
           </a:p>
@@ -782,7 +784,7 @@
           <a:p>
             <a:r>
               <a:rPr lang="en-US" dirty="0"/>
-              <a:t>Explain before lab: this app is local, not Juice Shop; solo, not a bonus-round competition. The real graded turn is running fixed_app.py and showing escaping stops the golf payloads while CSRF still gets through — that contrast is the point. ~3 min.</a:t>
+              <a:t>Quick reference for the worksheet — these three are what's graded this week. Clickjacking (CWE-1021) isn't part of this lab; don't cite it here. ~1 min.</a:t>
             </a:r>
             <a:endParaRPr lang="en-US" dirty="0"/>
           </a:p>
@@ -870,7 +872,7 @@
           <a:p>
             <a:r>
               <a:rPr lang="en-US" dirty="0"/>
-              <a:t>Logistics. Step 4 is the one people get backwards: the defended app still falls to CSRF, on purpose — the lesson is that SameSite protects cookie *attachment*, not request *authorization*. Steps 3-4 (defend) are graded. Q6 of the quiz asks for their own scoring payload + the sink it hit.</a:t>
+              <a:t>The payoff. #1: encode for the OUTPUT CONTEXT (the bug is on output). Modern frameworks auto-escape — the danger is when devs opt out (innerHTML). Be accurate about CSP here: this lab's escaping already neutralizes every payload before CSP would ever matter, so students will NOT see a CSP violation fire in the console today — it's set as a header, its blocking behavior is asserted, not demonstrated, in this sandbox. ~6 min.</a:t>
             </a:r>
             <a:endParaRPr lang="en-US" dirty="0"/>
           </a:p>
@@ -958,7 +960,7 @@
           <a:p>
             <a:r>
               <a:rPr lang="en-US" dirty="0"/>
-              <a:t>Logistics. Step 4 is the one people get backwards: the defended app still falls to CSRF, on purpose — the lesson is that SameSite protects cookie *attachment*, not request *authorization*. Steps 3-4 (defend) are graded. Q6 of the quiz asks for their own scoring payload + the sink it hit.</a:t>
+              <a:t>Explain before lab: this app is local, not Juice Shop; solo, not a bonus-round competition. The real graded turn is running fixed_app.py and showing escaping stops the golf payloads while CSRF still gets through — that contrast is the point. ~3 min.</a:t>
             </a:r>
             <a:endParaRPr lang="en-US" dirty="0"/>
           </a:p>
@@ -1046,7 +1048,7 @@
           <a:p>
             <a:r>
               <a:rPr lang="en-US" dirty="0"/>
-              <a:t>Before/after + the reasoning note — the CSRF note is graded on getting the SameSite-doesn't-equal-authorization distinction right, not on claiming the defense worked. Remind the AI-resilient tasks count.</a:t>
+              <a:t>Logistics. Step 4 is the one people get backwards: the defended app still falls to CSRF, on purpose — the lesson is that SameSite protects cookie *attachment*, not request *authorization*. Steps 3-4 (defend) are graded. Q6 of the quiz asks for their own scoring payload + the sink it hit.</a:t>
             </a:r>
             <a:endParaRPr lang="en-US" dirty="0"/>
           </a:p>
@@ -1134,7 +1136,7 @@
           <a:p>
             <a:r>
               <a:rPr lang="en-US" dirty="0"/>
-              <a:t>Recap. Cold-call: "where is the XSS bug — input or output?" (output rendering). Second cold-call: "if SameSite=Strict is set, why did CSRF still work today?" (the endpoint never checked who was asking). ~2 min.</a:t>
+              <a:t>Logistics. Step 4 is the one people get backwards: the defended app still falls to CSRF, on purpose — the lesson is that SameSite protects cookie *attachment*, not request *authorization*. Steps 3-4 (defend) are graded. Q6 of the quiz asks for their own scoring payload + the sink it hit.</a:t>
             </a:r>
             <a:endParaRPr lang="en-US" dirty="0"/>
           </a:p>
@@ -1222,7 +1224,7 @@
           <a:p>
             <a:r>
               <a:rPr lang="en-US" dirty="0"/>
-              <a:t>Cliffhanger: "Next week — change one number in a URL and read someone else's data; forge a token and become admin." Remind Juice Shop ready.</a:t>
+              <a:t>Before/after + the reasoning note — the CSRF note is graded on getting the SameSite-doesn't-equal-authorization distinction right, not on claiming the defense worked. Remind the AI-resilient tasks count.</a:t>
             </a:r>
             <a:endParaRPr lang="en-US" dirty="0"/>
           </a:p>
@@ -1246,6 +1248,182 @@
             <a:fld id="{F7021451-1387-4CA6-816F-3879F97B5CBC}" type="slidenum">
               <a:rPr lang="en-US"/>
               <a:t>17</a:t>
+            </a:fld>
+            <a:endParaRPr lang="en-US"/>
+          </a:p>
+        </p:txBody>
+      </p:sp>
+    </p:spTree>
+    <p:extLst>
+      <p:ext uri="{BB962C8B-B14F-4D97-AF65-F5344CB8AC3E}">
+        <p14:creationId xmlns:p14="http://schemas.microsoft.com/office/powerpoint/2010/main" val="1024086991"/>
+      </p:ext>
+    </p:extLst>
+  </p:cSld>
+  <p:clrMapOvr>
+    <a:masterClrMapping/>
+  </p:clrMapOvr>
+</p:notes>
+</file>
+
+<file path=ppt/notesSlides/notesSlide18.xml><?xml version="1.0" encoding="utf-8"?>
+<p:notes xmlns:a="http://schemas.openxmlformats.org/drawingml/2006/main" xmlns:r="http://schemas.openxmlformats.org/officeDocument/2006/relationships" xmlns:p="http://schemas.openxmlformats.org/presentationml/2006/main">
+  <p:cSld>
+    <p:spTree>
+      <p:nvGrpSpPr>
+        <p:cNvPr id="1" name=""/>
+        <p:cNvGrpSpPr/>
+        <p:nvPr/>
+      </p:nvGrpSpPr>
+      <p:grpSpPr>
+        <a:xfrm>
+          <a:off x="0" y="0"/>
+          <a:ext cx="0" cy="0"/>
+          <a:chOff x="0" y="0"/>
+          <a:chExt cx="0" cy="0"/>
+        </a:xfrm>
+      </p:grpSpPr>
+      <p:sp>
+        <p:nvSpPr>
+          <p:cNvPr id="2" name="Slide Image Placeholder 1"/>
+          <p:cNvSpPr>
+            <a:spLocks noGrp="1" noRot="1" noChangeAspect="1"/>
+          </p:cNvSpPr>
+          <p:nvPr>
+            <p:ph type="sldImg"/>
+          </p:nvPr>
+        </p:nvSpPr>
+        <p:spPr/>
+      </p:sp>
+      <p:sp>
+        <p:nvSpPr>
+          <p:cNvPr id="3" name="Notes Placeholder 2"/>
+          <p:cNvSpPr>
+            <a:spLocks noGrp="1"/>
+          </p:cNvSpPr>
+          <p:nvPr>
+            <p:ph type="body" idx="1"/>
+          </p:nvPr>
+        </p:nvSpPr>
+        <p:spPr/>
+        <p:txBody>
+          <a:bodyPr/>
+          <a:lstStyle/>
+          <a:p>
+            <a:r>
+              <a:rPr lang="en-US" dirty="0"/>
+              <a:t>Recap. Cold-call: "where is the XSS bug — input or output?" (output rendering). Second cold-call: "if SameSite=Strict is set, why did CSRF still work today?" (the endpoint never checked who was asking). ~2 min.</a:t>
+            </a:r>
+            <a:endParaRPr lang="en-US" dirty="0"/>
+          </a:p>
+        </p:txBody>
+      </p:sp>
+      <p:sp>
+        <p:nvSpPr>
+          <p:cNvPr id="4" name="Slide Number Placeholder 3"/>
+          <p:cNvSpPr>
+            <a:spLocks noGrp="1"/>
+          </p:cNvSpPr>
+          <p:nvPr>
+            <p:ph type="sldNum" sz="quarter" idx="10"/>
+          </p:nvPr>
+        </p:nvSpPr>
+        <p:spPr/>
+        <p:txBody>
+          <a:bodyPr/>
+          <a:lstStyle/>
+          <a:p>
+            <a:fld id="{F7021451-1387-4CA6-816F-3879F97B5CBC}" type="slidenum">
+              <a:rPr lang="en-US"/>
+              <a:t>18</a:t>
+            </a:fld>
+            <a:endParaRPr lang="en-US"/>
+          </a:p>
+        </p:txBody>
+      </p:sp>
+    </p:spTree>
+    <p:extLst>
+      <p:ext uri="{BB962C8B-B14F-4D97-AF65-F5344CB8AC3E}">
+        <p14:creationId xmlns:p14="http://schemas.microsoft.com/office/powerpoint/2010/main" val="1024086991"/>
+      </p:ext>
+    </p:extLst>
+  </p:cSld>
+  <p:clrMapOvr>
+    <a:masterClrMapping/>
+  </p:clrMapOvr>
+</p:notes>
+</file>
+
+<file path=ppt/notesSlides/notesSlide19.xml><?xml version="1.0" encoding="utf-8"?>
+<p:notes xmlns:a="http://schemas.openxmlformats.org/drawingml/2006/main" xmlns:r="http://schemas.openxmlformats.org/officeDocument/2006/relationships" xmlns:p="http://schemas.openxmlformats.org/presentationml/2006/main">
+  <p:cSld>
+    <p:spTree>
+      <p:nvGrpSpPr>
+        <p:cNvPr id="1" name=""/>
+        <p:cNvGrpSpPr/>
+        <p:nvPr/>
+      </p:nvGrpSpPr>
+      <p:grpSpPr>
+        <a:xfrm>
+          <a:off x="0" y="0"/>
+          <a:ext cx="0" cy="0"/>
+          <a:chOff x="0" y="0"/>
+          <a:chExt cx="0" cy="0"/>
+        </a:xfrm>
+      </p:grpSpPr>
+      <p:sp>
+        <p:nvSpPr>
+          <p:cNvPr id="2" name="Slide Image Placeholder 1"/>
+          <p:cNvSpPr>
+            <a:spLocks noGrp="1" noRot="1" noChangeAspect="1"/>
+          </p:cNvSpPr>
+          <p:nvPr>
+            <p:ph type="sldImg"/>
+          </p:nvPr>
+        </p:nvSpPr>
+        <p:spPr/>
+      </p:sp>
+      <p:sp>
+        <p:nvSpPr>
+          <p:cNvPr id="3" name="Notes Placeholder 2"/>
+          <p:cNvSpPr>
+            <a:spLocks noGrp="1"/>
+          </p:cNvSpPr>
+          <p:nvPr>
+            <p:ph type="body" idx="1"/>
+          </p:nvPr>
+        </p:nvSpPr>
+        <p:spPr/>
+        <p:txBody>
+          <a:bodyPr/>
+          <a:lstStyle/>
+          <a:p>
+            <a:r>
+              <a:rPr lang="en-US" dirty="0"/>
+              <a:t>Cliffhanger: "Next week — change one number in a URL and read someone else's data; forge a token and become admin." Remind Juice Shop ready.</a:t>
+            </a:r>
+            <a:endParaRPr lang="en-US" dirty="0"/>
+          </a:p>
+        </p:txBody>
+      </p:sp>
+      <p:sp>
+        <p:nvSpPr>
+          <p:cNvPr id="4" name="Slide Number Placeholder 3"/>
+          <p:cNvSpPr>
+            <a:spLocks noGrp="1"/>
+          </p:cNvSpPr>
+          <p:nvPr>
+            <p:ph type="sldNum" sz="quarter" idx="10"/>
+          </p:nvPr>
+        </p:nvSpPr>
+        <p:spPr/>
+        <p:txBody>
+          <a:bodyPr/>
+          <a:lstStyle/>
+          <a:p>
+            <a:fld id="{F7021451-1387-4CA6-816F-3879F97B5CBC}" type="slidenum">
+              <a:rPr lang="en-US"/>
+              <a:t>19</a:t>
             </a:fld>
             <a:endParaRPr lang="en-US"/>
           </a:p>
@@ -1838,7 +2016,7 @@
           <a:p>
             <a:r>
               <a:rPr lang="en-US" dirty="0"/>
-              <a:t>Contrast with XSS: CSRF needs no script on the page — it abuses the browser auto-attaching cookies. Example: a hidden form that POSTs a comment. Don't let "SameSite fixes CSRF" stand unqualified — this week's own fixed_app.py sets SameSite=Strict+HttpOnly+Secure and the CSRF PoC still works, because /comments never checks a session or token at all. ~5 min.</a:t>
+              <a:t>Live payoff for "context matters" — one escaper is right for some of the 4 sinks and wrong for others, computed live rather than asserted (3 verdicts: EXECUTES / BROKEN / SAFE — a wrecked script tag is not "safe" either). Ties straight into the Defenses slide's "encode per context." ~4 min.</a:t>
             </a:r>
             <a:endParaRPr lang="en-US" dirty="0"/>
           </a:p>
@@ -1926,7 +2104,7 @@
           <a:p>
             <a:r>
               <a:rPr lang="en-US" dirty="0"/>
-              <a:t>Make it real. Magecart = the keylogging harm from 2 slides ago, at scale, on a Fortune-500 checkout. Note it often enters via a compromised third-party script — which motivates CSP next. ~3 min.</a:t>
+              <a:t>Contrast with XSS: CSRF needs no script on the page — it abuses the browser auto-attaching cookies. Example: a hidden form that POSTs a comment. Don't let "SameSite fixes CSRF" stand unqualified — this week's own fixed_app.py sets SameSite=Strict+HttpOnly+Secure and the CSRF PoC still works, because /comments never checks a session or token at all. ~5 min.</a:t>
             </a:r>
             <a:endParaRPr lang="en-US" dirty="0"/>
           </a:p>
@@ -2559,7 +2737,7 @@
                 <a:ea typeface="Arial" pitchFamily="34" charset="-122"/>
                 <a:cs typeface="Arial" pitchFamily="34" charset="-120"/>
               </a:rPr>
-              <a:t>CWE mapping</a:t>
+              <a:t>Same cookie, opposite directions</a:t>
             </a:r>
             <a:endParaRPr lang="en-US" sz="2600" dirty="0"/>
           </a:p>
@@ -2567,43 +2745,14 @@
       </p:sp>
       <p:sp>
         <p:nvSpPr>
-          <p:cNvPr id="5" name="Shape 2"/>
-          <p:cNvSpPr/>
-          <p:nvPr/>
-        </p:nvSpPr>
-        <p:spPr>
-          <a:xfrm>
-            <a:off x="457200" y="1325880"/>
-            <a:ext cx="8229600" cy="1207008"/>
-          </a:xfrm>
-          <a:prstGeom prst="roundRect">
-            <a:avLst>
-              <a:gd name="adj" fmla="val 6061"/>
-            </a:avLst>
-          </a:prstGeom>
-          <a:solidFill>
-            <a:srgbClr val="F1F5F9"/>
-          </a:solidFill>
-          <a:ln/>
-          <a:effectLst>
-            <a:outerShdw sx="100000" sy="100000" kx="0" ky="0" algn="bl" rotWithShape="0" blurRad="76200" dist="25400" dir="5400000">
-              <a:srgbClr val="000000">
-                <a:alpha val="12000"/>
-              </a:srgbClr>
-            </a:outerShdw>
-          </a:effectLst>
-        </p:spPr>
-      </p:sp>
-      <p:sp>
-        <p:nvSpPr>
-          <p:cNvPr id="6" name="Text 3"/>
-          <p:cNvSpPr/>
-          <p:nvPr/>
-        </p:nvSpPr>
-        <p:spPr>
-          <a:xfrm>
-            <a:off x="731520" y="1435608"/>
-            <a:ext cx="7680960" cy="987552"/>
+          <p:cNvPr id="5" name="Text 2"/>
+          <p:cNvSpPr/>
+          <p:nvPr/>
+        </p:nvSpPr>
+        <p:spPr>
+          <a:xfrm>
+            <a:off x="548640" y="1325880"/>
+            <a:ext cx="8046720" cy="2468880"/>
           </a:xfrm>
           <a:prstGeom prst="rect">
             <a:avLst/>
@@ -2617,12 +2766,8 @@
           </a:bodyPr>
           <a:lstStyle/>
           <a:p>
-            <a:pPr marL="342900" indent="-342900">
-              <a:spcAft>
-                <a:spcPts val="600"/>
-              </a:spcAft>
-              <a:buSzPct val="100000"/>
-              <a:buChar char="•"/>
+            <a:pPr indent="0" marL="0">
+              <a:buNone/>
             </a:pPr>
             <a:r>
               <a:rPr lang="en-US" sz="1400" dirty="0">
@@ -2633,87 +2778,45 @@
                 <a:ea typeface="Calibri" pitchFamily="34" charset="-122"/>
                 <a:cs typeface="Calibri" pitchFamily="34" charset="-120"/>
               </a:rPr>
-              <a:t>CWE-79 — Cross-site scripting</a:t>
+              <a:t>See diagram: Two stacked panels comparing stored XSS with CSRF, using the same attacker/server/victim actors. Stored XSS: attacker posts a script, the victim loads it, it runs in the victim's origin and steals the cookie (no HttpOnly) — fixed by output encoding, not SameSite, since the payload is already same-origin. CSRF: the victim visits the attacker's page, which auto-submits a form; the browser attaches the cookie itself and the server can't tell the victim never meant to send it — fixed by SameSite plus a CSRF token the server actually checks, not HttpOnly, since no script ever reads the cookie. (web only)</a:t>
             </a:r>
             <a:endParaRPr lang="en-US" sz="1400" dirty="0"/>
           </a:p>
-          <a:p>
-            <a:pPr marL="342900" indent="-342900">
-              <a:spcAft>
-                <a:spcPts val="600"/>
-              </a:spcAft>
-              <a:buSzPct val="100000"/>
-              <a:buChar char="•"/>
-            </a:pPr>
-            <a:r>
-              <a:rPr lang="en-US" sz="1400" dirty="0">
-                <a:solidFill>
-                  <a:srgbClr val="1F2937"/>
+        </p:txBody>
+      </p:sp>
+      <p:sp>
+        <p:nvSpPr>
+          <p:cNvPr id="6" name="Text 3"/>
+          <p:cNvSpPr/>
+          <p:nvPr/>
+        </p:nvSpPr>
+        <p:spPr>
+          <a:xfrm>
+            <a:off x="457200" y="4800600"/>
+            <a:ext cx="6949440" cy="274320"/>
+          </a:xfrm>
+          <a:prstGeom prst="rect">
+            <a:avLst/>
+          </a:prstGeom>
+          <a:noFill/>
+          <a:ln/>
+        </p:spPr>
+        <p:txBody>
+          <a:bodyPr wrap="square" lIns="0" tIns="0" rIns="0" bIns="0" rtlCol="0" anchor="ctr"/>
+          <a:lstStyle/>
+          <a:p>
+            <a:pPr indent="0" marL="0">
+              <a:buNone/>
+            </a:pPr>
+            <a:r>
+              <a:rPr lang="en-US" sz="900" dirty="0">
+                <a:solidFill>
+                  <a:srgbClr val="64748B"/>
                 </a:solidFill>
                 <a:latin typeface="Calibri" pitchFamily="34" charset="0"/>
                 <a:ea typeface="Calibri" pitchFamily="34" charset="-122"/>
                 <a:cs typeface="Calibri" pitchFamily="34" charset="-120"/>
               </a:rPr>
-              <a:t>CWE-352 — CSRF</a:t>
-            </a:r>
-            <a:endParaRPr lang="en-US" sz="1400" dirty="0"/>
-          </a:p>
-          <a:p>
-            <a:pPr marL="342900" indent="-342900">
-              <a:spcAft>
-                <a:spcPts val="600"/>
-              </a:spcAft>
-              <a:buSzPct val="100000"/>
-              <a:buChar char="•"/>
-            </a:pPr>
-            <a:r>
-              <a:rPr lang="en-US" sz="1400" dirty="0">
-                <a:solidFill>
-                  <a:srgbClr val="1F2937"/>
-                </a:solidFill>
-                <a:latin typeface="Calibri" pitchFamily="34" charset="0"/>
-                <a:ea typeface="Calibri" pitchFamily="34" charset="-122"/>
-                <a:cs typeface="Calibri" pitchFamily="34" charset="-120"/>
-              </a:rPr>
-              <a:t>CWE-1004 — cookie set without HttpOnly (this week's cookie-theft task)</a:t>
-            </a:r>
-            <a:endParaRPr lang="en-US" sz="1400" dirty="0"/>
-          </a:p>
-        </p:txBody>
-      </p:sp>
-      <p:sp>
-        <p:nvSpPr>
-          <p:cNvPr id="7" name="Text 4"/>
-          <p:cNvSpPr/>
-          <p:nvPr/>
-        </p:nvSpPr>
-        <p:spPr>
-          <a:xfrm>
-            <a:off x="457200" y="4800600"/>
-            <a:ext cx="6949440" cy="274320"/>
-          </a:xfrm>
-          <a:prstGeom prst="rect">
-            <a:avLst/>
-          </a:prstGeom>
-          <a:noFill/>
-          <a:ln/>
-        </p:spPr>
-        <p:txBody>
-          <a:bodyPr wrap="square" lIns="0" tIns="0" rIns="0" bIns="0" rtlCol="0" anchor="ctr"/>
-          <a:lstStyle/>
-          <a:p>
-            <a:pPr indent="0" marL="0">
-              <a:buNone/>
-            </a:pPr>
-            <a:r>
-              <a:rPr lang="en-US" sz="900" dirty="0">
-                <a:solidFill>
-                  <a:srgbClr val="64748B"/>
-                </a:solidFill>
-                <a:latin typeface="Calibri" pitchFamily="34" charset="0"/>
-                <a:ea typeface="Calibri" pitchFamily="34" charset="-122"/>
-                <a:cs typeface="Calibri" pitchFamily="34" charset="-120"/>
-              </a:rPr>
               <a:t>Software Security · Week 5</a:t>
             </a:r>
             <a:endParaRPr lang="en-US" sz="900" dirty="0"/>
@@ -2722,7 +2825,7 @@
       </p:sp>
       <p:pic>
         <p:nvPicPr>
-          <p:cNvPr id="8" name="Image 1" descr="/Users/pop7/Library/CloudStorage/OneDrive-MonsterConnectCo.,Ltd/Lecture/KOSEN69 - software-security/slides/pptx/assets/logo-small.png">    </p:cNvPr>
+          <p:cNvPr id="7" name="Image 1" descr="/Users/pop7/Library/CloudStorage/OneDrive-MonsterConnectCo.,Ltd/Lecture/KOSEN69 - software-security/slides/pptx/assets/logo-small.png">    </p:cNvPr>
           <p:cNvPicPr>
             <a:picLocks noChangeAspect="1"/>
           </p:cNvPicPr>
@@ -2860,7 +2963,7 @@
                 <a:ea typeface="Arial" pitchFamily="34" charset="-122"/>
                 <a:cs typeface="Arial" pitchFamily="34" charset="-120"/>
               </a:rPr>
-              <a:t>Defenses</a:t>
+              <a:t>Real-world: British Airways (2018)</a:t>
             </a:r>
             <a:endParaRPr lang="en-US" sz="2600" dirty="0"/>
           </a:p>
@@ -2875,11 +2978,11 @@
         <p:spPr>
           <a:xfrm>
             <a:off x="457200" y="1325880"/>
-            <a:ext cx="8229600" cy="1920240"/>
+            <a:ext cx="8229600" cy="1408176"/>
           </a:xfrm>
           <a:prstGeom prst="roundRect">
             <a:avLst>
-              <a:gd name="adj" fmla="val 3810"/>
+              <a:gd name="adj" fmla="val 5195"/>
             </a:avLst>
           </a:prstGeom>
           <a:solidFill>
@@ -2904,7 +3007,7 @@
         <p:spPr>
           <a:xfrm>
             <a:off x="731520" y="1435608"/>
-            <a:ext cx="7680960" cy="1700784"/>
+            <a:ext cx="7680960" cy="1188720"/>
           </a:xfrm>
           <a:prstGeom prst="rect">
             <a:avLst/>
@@ -2934,7 +3037,7 @@
                 <a:ea typeface="Calibri" pitchFamily="34" charset="-122"/>
                 <a:cs typeface="Calibri" pitchFamily="34" charset="-120"/>
               </a:rPr>
-              <a:t>Output encoding per context (HTML/attr/JS/URL)</a:t>
+              <a:t>Attackers injected malicious JS (Magecart) into BA's site/app</a:t>
             </a:r>
             <a:endParaRPr lang="en-US" sz="1400" dirty="0"/>
           </a:p>
@@ -2955,7 +3058,7 @@
                 <a:ea typeface="Calibri" pitchFamily="34" charset="-122"/>
                 <a:cs typeface="Calibri" pitchFamily="34" charset="-120"/>
               </a:rPr>
-              <a:t>Framework auto-escaping (don't bypass with innerHTML/dangerouslySetInnerHTML)</a:t>
+              <a:t>Script skimmed credit-card details as users typed</a:t>
             </a:r>
             <a:endParaRPr lang="en-US" sz="1400" dirty="0"/>
           </a:p>
@@ -2976,28 +3079,70 @@
                 <a:ea typeface="Calibri" pitchFamily="34" charset="-122"/>
                 <a:cs typeface="Calibri" pitchFamily="34" charset="-120"/>
               </a:rPr>
-              <a:t>Content Security Policy — a defense-in-depth header, set alongside escaping — it doesn't replace it</a:t>
+              <a:t>~380k payment records skimmed; ICO proposed a £183M fine, finalized at £20M (2020, ~89% reduction)</a:t>
             </a:r>
             <a:endParaRPr lang="en-US" sz="1400" dirty="0"/>
           </a:p>
-          <a:p>
-            <a:pPr marL="342900" indent="-342900">
-              <a:spcAft>
-                <a:spcPts val="600"/>
-              </a:spcAft>
-              <a:buSzPct val="100000"/>
-              <a:buChar char="•"/>
-            </a:pPr>
-            <a:r>
-              <a:rPr lang="en-US" sz="1400" dirty="0">
-                <a:solidFill>
-                  <a:srgbClr val="1F2937"/>
+        </p:txBody>
+      </p:sp>
+      <p:sp>
+        <p:nvSpPr>
+          <p:cNvPr id="7" name="Shape 4"/>
+          <p:cNvSpPr/>
+          <p:nvPr/>
+        </p:nvSpPr>
+        <p:spPr>
+          <a:xfrm>
+            <a:off x="457200" y="2898648"/>
+            <a:ext cx="8229600" cy="822960"/>
+          </a:xfrm>
+          <a:prstGeom prst="roundRect">
+            <a:avLst>
+              <a:gd name="adj" fmla="val 8889"/>
+            </a:avLst>
+          </a:prstGeom>
+          <a:solidFill>
+            <a:srgbClr val="E8EDF3"/>
+          </a:solidFill>
+          <a:ln/>
+        </p:spPr>
+      </p:sp>
+      <p:sp>
+        <p:nvSpPr>
+          <p:cNvPr id="8" name="Text 5"/>
+          <p:cNvSpPr/>
+          <p:nvPr/>
+        </p:nvSpPr>
+        <p:spPr>
+          <a:xfrm>
+            <a:off x="731520" y="2898648"/>
+            <a:ext cx="7680960" cy="822960"/>
+          </a:xfrm>
+          <a:prstGeom prst="rect">
+            <a:avLst/>
+          </a:prstGeom>
+          <a:noFill/>
+          <a:ln/>
+        </p:spPr>
+        <p:txBody>
+          <a:bodyPr wrap="square" lIns="0" tIns="0" rIns="0" bIns="0" rtlCol="0" anchor="ctr">
+            <a:normAutofit/>
+          </a:bodyPr>
+          <a:lstStyle/>
+          <a:p>
+            <a:pPr indent="0" marL="0">
+              <a:buNone/>
+            </a:pPr>
+            <a:r>
+              <a:rPr lang="en-US" sz="1400" i="1" dirty="0">
+                <a:solidFill>
+                  <a:srgbClr val="E35205"/>
                 </a:solidFill>
                 <a:latin typeface="Calibri" pitchFamily="34" charset="0"/>
                 <a:ea typeface="Calibri" pitchFamily="34" charset="-122"/>
                 <a:cs typeface="Calibri" pitchFamily="34" charset="-120"/>
               </a:rPr>
-              <a:t>HttpOnly + SameSite cookies; anti-CSRF tokens and an endpoint that actually checks who's asking</a:t>
+              <a:t>Client-side injection = real money + real fines.</a:t>
             </a:r>
             <a:endParaRPr lang="en-US" sz="1400" dirty="0"/>
           </a:p>
@@ -3005,7 +3150,7 @@
       </p:sp>
       <p:sp>
         <p:nvSpPr>
-          <p:cNvPr id="7" name="Text 4"/>
+          <p:cNvPr id="9" name="Text 6"/>
           <p:cNvSpPr/>
           <p:nvPr/>
         </p:nvSpPr>
@@ -3044,7 +3189,7 @@
       </p:sp>
       <p:pic>
         <p:nvPicPr>
-          <p:cNvPr id="8" name="Image 1" descr="/Users/pop7/Library/CloudStorage/OneDrive-MonsterConnectCo.,Ltd/Lecture/KOSEN69 - software-security/slides/pptx/assets/logo-small.png">    </p:cNvPr>
+          <p:cNvPr id="10" name="Image 1" descr="/Users/pop7/Library/CloudStorage/OneDrive-MonsterConnectCo.,Ltd/Lecture/KOSEN69 - software-security/slides/pptx/assets/logo-small.png">    </p:cNvPr>
           <p:cNvPicPr>
             <a:picLocks noChangeAspect="1"/>
           </p:cNvPicPr>
@@ -3182,7 +3327,7 @@
                 <a:ea typeface="Arial" pitchFamily="34" charset="-122"/>
                 <a:cs typeface="Arial" pitchFamily="34" charset="-120"/>
               </a:rPr>
-              <a:t>⛳ Game — XSS Golf</a:t>
+              <a:t>CWE mapping</a:t>
             </a:r>
             <a:endParaRPr lang="en-US" sz="2600" dirty="0"/>
           </a:p>
@@ -3190,59 +3335,18 @@
       </p:sp>
       <p:sp>
         <p:nvSpPr>
-          <p:cNvPr id="5" name="Text 2"/>
-          <p:cNvSpPr/>
-          <p:nvPr/>
-        </p:nvSpPr>
-        <p:spPr>
-          <a:xfrm>
-            <a:off x="548640" y="1325880"/>
-            <a:ext cx="8046720" cy="822960"/>
-          </a:xfrm>
-          <a:prstGeom prst="rect">
-            <a:avLst/>
-          </a:prstGeom>
-          <a:noFill/>
-          <a:ln/>
-        </p:spPr>
-        <p:txBody>
-          <a:bodyPr wrap="square" lIns="0" tIns="0" rIns="0" bIns="0" rtlCol="0" anchor="t">
-            <a:normAutofit/>
-          </a:bodyPr>
-          <a:lstStyle/>
-          <a:p>
-            <a:pPr indent="0" marL="0">
-              <a:buNone/>
-            </a:pPr>
-            <a:r>
-              <a:rPr lang="en-US" sz="1400" dirty="0">
-                <a:solidFill>
-                  <a:srgbClr val="1F2937"/>
-                </a:solidFill>
-                <a:latin typeface="Calibri" pitchFamily="34" charset="0"/>
-                <a:ea typeface="Calibri" pitchFamily="34" charset="-122"/>
-                <a:cs typeface="Calibri" pitchFamily="34" charset="-120"/>
-              </a:rPr>
-              <a:t>Craft the shortest payload that pops alert(1) / steals a cookie against vulnerable_app.py.</a:t>
-            </a:r>
-            <a:endParaRPr lang="en-US" sz="1400" dirty="0"/>
-          </a:p>
-        </p:txBody>
-      </p:sp>
-      <p:sp>
-        <p:nvSpPr>
-          <p:cNvPr id="6" name="Shape 3"/>
-          <p:cNvSpPr/>
-          <p:nvPr/>
-        </p:nvSpPr>
-        <p:spPr>
-          <a:xfrm>
-            <a:off x="457200" y="2240280"/>
-            <a:ext cx="8229600" cy="1298448"/>
+          <p:cNvPr id="5" name="Shape 2"/>
+          <p:cNvSpPr/>
+          <p:nvPr/>
+        </p:nvSpPr>
+        <p:spPr>
+          <a:xfrm>
+            <a:off x="457200" y="1325880"/>
+            <a:ext cx="8229600" cy="1207008"/>
           </a:xfrm>
           <a:prstGeom prst="roundRect">
             <a:avLst>
-              <a:gd name="adj" fmla="val 5634"/>
+              <a:gd name="adj" fmla="val 6061"/>
             </a:avLst>
           </a:prstGeom>
           <a:solidFill>
@@ -3260,14 +3364,14 @@
       </p:sp>
       <p:sp>
         <p:nvSpPr>
-          <p:cNvPr id="7" name="Text 4"/>
-          <p:cNvSpPr/>
-          <p:nvPr/>
-        </p:nvSpPr>
-        <p:spPr>
-          <a:xfrm>
-            <a:off x="731520" y="2350008"/>
-            <a:ext cx="7680960" cy="1078992"/>
+          <p:cNvPr id="6" name="Text 3"/>
+          <p:cNvSpPr/>
+          <p:nvPr/>
+        </p:nvSpPr>
+        <p:spPr>
+          <a:xfrm>
+            <a:off x="731520" y="1435608"/>
+            <a:ext cx="7680960" cy="987552"/>
           </a:xfrm>
           <a:prstGeom prst="rect">
             <a:avLst/>
@@ -3297,7 +3401,7 @@
                 <a:ea typeface="Calibri" pitchFamily="34" charset="-122"/>
                 <a:cs typeface="Calibri" pitchFamily="34" charset="-120"/>
               </a:rPr>
-              <a:t>Solo scoring by character count (no filter to beat — it's a golf exercise, not a bypass race)</a:t>
+              <a:t>CWE-79 — Cross-site scripting</a:t>
             </a:r>
             <a:endParaRPr lang="en-US" sz="1400" dirty="0"/>
           </a:p>
@@ -3318,45 +3422,66 @@
                 <a:ea typeface="Calibri" pitchFamily="34" charset="-122"/>
                 <a:cs typeface="Calibri" pitchFamily="34" charset="-120"/>
               </a:rPr>
-              <a:t>Defend: run fixed_app.py — same payloads, now escaped — then prove CSRF still works against it and explain why</a:t>
+              <a:t>CWE-352 — CSRF</a:t>
             </a:r>
             <a:endParaRPr lang="en-US" sz="1400" dirty="0"/>
           </a:p>
-        </p:txBody>
-      </p:sp>
-      <p:sp>
-        <p:nvSpPr>
-          <p:cNvPr id="8" name="Text 5"/>
-          <p:cNvSpPr/>
-          <p:nvPr/>
-        </p:nvSpPr>
-        <p:spPr>
-          <a:xfrm>
-            <a:off x="457200" y="4800600"/>
-            <a:ext cx="6949440" cy="274320"/>
-          </a:xfrm>
-          <a:prstGeom prst="rect">
-            <a:avLst/>
-          </a:prstGeom>
-          <a:noFill/>
-          <a:ln/>
-        </p:spPr>
-        <p:txBody>
-          <a:bodyPr wrap="square" lIns="0" tIns="0" rIns="0" bIns="0" rtlCol="0" anchor="ctr"/>
-          <a:lstStyle/>
-          <a:p>
-            <a:pPr indent="0" marL="0">
-              <a:buNone/>
-            </a:pPr>
-            <a:r>
-              <a:rPr lang="en-US" sz="900" dirty="0">
-                <a:solidFill>
-                  <a:srgbClr val="64748B"/>
+          <a:p>
+            <a:pPr marL="342900" indent="-342900">
+              <a:spcAft>
+                <a:spcPts val="600"/>
+              </a:spcAft>
+              <a:buSzPct val="100000"/>
+              <a:buChar char="•"/>
+            </a:pPr>
+            <a:r>
+              <a:rPr lang="en-US" sz="1400" dirty="0">
+                <a:solidFill>
+                  <a:srgbClr val="1F2937"/>
                 </a:solidFill>
                 <a:latin typeface="Calibri" pitchFamily="34" charset="0"/>
                 <a:ea typeface="Calibri" pitchFamily="34" charset="-122"/>
                 <a:cs typeface="Calibri" pitchFamily="34" charset="-120"/>
               </a:rPr>
+              <a:t>CWE-1004 — cookie set without HttpOnly (this week's cookie-theft task)</a:t>
+            </a:r>
+            <a:endParaRPr lang="en-US" sz="1400" dirty="0"/>
+          </a:p>
+        </p:txBody>
+      </p:sp>
+      <p:sp>
+        <p:nvSpPr>
+          <p:cNvPr id="7" name="Text 4"/>
+          <p:cNvSpPr/>
+          <p:nvPr/>
+        </p:nvSpPr>
+        <p:spPr>
+          <a:xfrm>
+            <a:off x="457200" y="4800600"/>
+            <a:ext cx="6949440" cy="274320"/>
+          </a:xfrm>
+          <a:prstGeom prst="rect">
+            <a:avLst/>
+          </a:prstGeom>
+          <a:noFill/>
+          <a:ln/>
+        </p:spPr>
+        <p:txBody>
+          <a:bodyPr wrap="square" lIns="0" tIns="0" rIns="0" bIns="0" rtlCol="0" anchor="ctr"/>
+          <a:lstStyle/>
+          <a:p>
+            <a:pPr indent="0" marL="0">
+              <a:buNone/>
+            </a:pPr>
+            <a:r>
+              <a:rPr lang="en-US" sz="900" dirty="0">
+                <a:solidFill>
+                  <a:srgbClr val="64748B"/>
+                </a:solidFill>
+                <a:latin typeface="Calibri" pitchFamily="34" charset="0"/>
+                <a:ea typeface="Calibri" pitchFamily="34" charset="-122"/>
+                <a:cs typeface="Calibri" pitchFamily="34" charset="-120"/>
+              </a:rPr>
               <a:t>Software Security · Week 5</a:t>
             </a:r>
             <a:endParaRPr lang="en-US" sz="900" dirty="0"/>
@@ -3365,7 +3490,7 @@
       </p:sp>
       <p:pic>
         <p:nvPicPr>
-          <p:cNvPr id="9" name="Image 1" descr="/Users/pop7/Library/CloudStorage/OneDrive-MonsterConnectCo.,Ltd/Lecture/KOSEN69 - software-security/slides/pptx/assets/logo-small.png">    </p:cNvPr>
+          <p:cNvPr id="8" name="Image 1" descr="/Users/pop7/Library/CloudStorage/OneDrive-MonsterConnectCo.,Ltd/Lecture/KOSEN69 - software-security/slides/pptx/assets/logo-small.png">    </p:cNvPr>
           <p:cNvPicPr>
             <a:picLocks noChangeAspect="1"/>
           </p:cNvPicPr>
@@ -3503,7 +3628,7 @@
                 <a:ea typeface="Arial" pitchFamily="34" charset="-122"/>
                 <a:cs typeface="Arial" pitchFamily="34" charset="-120"/>
               </a:rPr>
-              <a:t>Lab steps</a:t>
+              <a:t>Defenses</a:t>
             </a:r>
             <a:endParaRPr lang="en-US" sz="2600" dirty="0"/>
           </a:p>
@@ -3518,17 +3643,24 @@
         <p:spPr>
           <a:xfrm>
             <a:off x="457200" y="1325880"/>
-            <a:ext cx="8229600" cy="822960"/>
+            <a:ext cx="8229600" cy="1920240"/>
           </a:xfrm>
           <a:prstGeom prst="roundRect">
             <a:avLst>
-              <a:gd name="adj" fmla="val 8889"/>
+              <a:gd name="adj" fmla="val 3810"/>
             </a:avLst>
           </a:prstGeom>
           <a:solidFill>
-            <a:srgbClr val="E8EDF3"/>
+            <a:srgbClr val="F1F5F9"/>
           </a:solidFill>
           <a:ln/>
+          <a:effectLst>
+            <a:outerShdw sx="100000" sy="100000" kx="0" ky="0" algn="bl" rotWithShape="0" blurRad="76200" dist="25400" dir="5400000">
+              <a:srgbClr val="000000">
+                <a:alpha val="12000"/>
+              </a:srgbClr>
+            </a:outerShdw>
+          </a:effectLst>
         </p:spPr>
       </p:sp>
       <p:sp>
@@ -3539,8 +3671,8 @@
         </p:nvSpPr>
         <p:spPr>
           <a:xfrm>
-            <a:off x="731520" y="1325880"/>
-            <a:ext cx="7680960" cy="822960"/>
+            <a:off x="731520" y="1435608"/>
+            <a:ext cx="7680960" cy="1700784"/>
           </a:xfrm>
           <a:prstGeom prst="rect">
             <a:avLst/>
@@ -3549,116 +3681,41 @@
           <a:ln/>
         </p:spPr>
         <p:txBody>
-          <a:bodyPr wrap="square" lIns="0" tIns="0" rIns="0" bIns="0" rtlCol="0" anchor="ctr">
+          <a:bodyPr wrap="square" lIns="0" tIns="0" rIns="0" bIns="0" rtlCol="0" anchor="t">
             <a:normAutofit/>
           </a:bodyPr>
           <a:lstStyle/>
           <a:p>
-            <a:pPr indent="0" marL="0">
-              <a:buNone/>
-            </a:pPr>
-            <a:r>
-              <a:rPr lang="en-US" sz="1400" i="1" dirty="0">
-                <a:solidFill>
-                  <a:srgbClr val="E35205"/>
+            <a:pPr marL="342900" indent="-342900">
+              <a:spcAft>
+                <a:spcPts val="600"/>
+              </a:spcAft>
+              <a:buSzPct val="100000"/>
+              <a:buChar char="•"/>
+            </a:pPr>
+            <a:r>
+              <a:rPr lang="en-US" sz="1400" dirty="0">
+                <a:solidFill>
+                  <a:srgbClr val="1F2937"/>
                 </a:solidFill>
                 <a:latin typeface="Calibri" pitchFamily="34" charset="0"/>
                 <a:ea typeface="Calibri" pitchFamily="34" charset="-122"/>
                 <a:cs typeface="Calibri" pitchFamily="34" charset="-120"/>
               </a:rPr>
-              <a:t>📋 Worksheet 5 — labs/week05-xss-client-side/worksheet.md (Part 3) · kickoff: docker compose up → http://localhost:8080</a:t>
+              <a:t>Output encoding per context (HTML/attr/JS/URL)</a:t>
             </a:r>
             <a:endParaRPr lang="en-US" sz="1400" dirty="0"/>
           </a:p>
-        </p:txBody>
-      </p:sp>
-      <p:sp>
-        <p:nvSpPr>
-          <p:cNvPr id="7" name="Shape 4"/>
-          <p:cNvSpPr/>
-          <p:nvPr/>
-        </p:nvSpPr>
-        <p:spPr>
-          <a:xfrm>
-            <a:off x="502920" y="2313432"/>
-            <a:ext cx="384048" cy="384048"/>
-          </a:xfrm>
-          <a:prstGeom prst="ellipse">
-            <a:avLst/>
-          </a:prstGeom>
-          <a:solidFill>
-            <a:srgbClr val="E35205"/>
-          </a:solidFill>
-          <a:ln/>
-        </p:spPr>
-      </p:sp>
-      <p:sp>
-        <p:nvSpPr>
-          <p:cNvPr id="8" name="Text 5"/>
-          <p:cNvSpPr/>
-          <p:nvPr/>
-        </p:nvSpPr>
-        <p:spPr>
-          <a:xfrm>
-            <a:off x="502920" y="2313432"/>
-            <a:ext cx="384048" cy="384048"/>
-          </a:xfrm>
-          <a:prstGeom prst="rect">
-            <a:avLst/>
-          </a:prstGeom>
-          <a:noFill/>
-          <a:ln/>
-        </p:spPr>
-        <p:txBody>
-          <a:bodyPr wrap="square" lIns="0" tIns="0" rIns="0" bIns="0" rtlCol="0" anchor="ctr"/>
-          <a:lstStyle/>
-          <a:p>
-            <a:pPr algn="ctr" indent="0" marL="0">
-              <a:buNone/>
-            </a:pPr>
-            <a:r>
-              <a:rPr lang="en-US" sz="1500" b="1" dirty="0">
-                <a:solidFill>
-                  <a:srgbClr val="0E1726"/>
-                </a:solidFill>
-                <a:latin typeface="Arial" pitchFamily="34" charset="0"/>
-                <a:ea typeface="Arial" pitchFamily="34" charset="-122"/>
-                <a:cs typeface="Arial" pitchFamily="34" charset="-120"/>
-              </a:rPr>
-              <a:t>1</a:t>
-            </a:r>
-            <a:endParaRPr lang="en-US" sz="1500" dirty="0"/>
-          </a:p>
-        </p:txBody>
-      </p:sp>
-      <p:sp>
-        <p:nvSpPr>
-          <p:cNvPr id="9" name="Text 6"/>
-          <p:cNvSpPr/>
-          <p:nvPr/>
-        </p:nvSpPr>
-        <p:spPr>
-          <a:xfrm>
-            <a:off x="1051560" y="2313432"/>
-            <a:ext cx="7589520" cy="658368"/>
-          </a:xfrm>
-          <a:prstGeom prst="rect">
-            <a:avLst/>
-          </a:prstGeom>
-          <a:noFill/>
-          <a:ln/>
-        </p:spPr>
-        <p:txBody>
-          <a:bodyPr wrap="square" lIns="0" tIns="0" rIns="0" bIns="0" rtlCol="0" anchor="ctr">
-            <a:normAutofit/>
-          </a:bodyPr>
-          <a:lstStyle/>
-          <a:p>
-            <a:pPr indent="0" marL="0">
-              <a:buNone/>
-            </a:pPr>
-            <a:r>
-              <a:rPr lang="en-US" sz="1350" dirty="0">
+          <a:p>
+            <a:pPr marL="342900" indent="-342900">
+              <a:spcAft>
+                <a:spcPts val="600"/>
+              </a:spcAft>
+              <a:buSzPct val="100000"/>
+              <a:buChar char="•"/>
+            </a:pPr>
+            <a:r>
+              <a:rPr lang="en-US" sz="1400" dirty="0">
                 <a:solidFill>
                   <a:srgbClr val="1F2937"/>
                 </a:solidFill>
@@ -3666,99 +3723,20 @@
                 <a:ea typeface="Calibri" pitchFamily="34" charset="-122"/>
                 <a:cs typeface="Calibri" pitchFamily="34" charset="-120"/>
               </a:rPr>
-              <a:t>Find reflected + stored XSS in vulnerable_app.py (DOM XSS via Juice Shop is optional/ungraded)</a:t>
-            </a:r>
-            <a:endParaRPr lang="en-US" sz="1350" dirty="0"/>
-          </a:p>
-        </p:txBody>
-      </p:sp>
-      <p:sp>
-        <p:nvSpPr>
-          <p:cNvPr id="10" name="Shape 7"/>
-          <p:cNvSpPr/>
-          <p:nvPr/>
-        </p:nvSpPr>
-        <p:spPr>
-          <a:xfrm>
-            <a:off x="502920" y="3044952"/>
-            <a:ext cx="384048" cy="384048"/>
-          </a:xfrm>
-          <a:prstGeom prst="ellipse">
-            <a:avLst/>
-          </a:prstGeom>
-          <a:solidFill>
-            <a:srgbClr val="E35205"/>
-          </a:solidFill>
-          <a:ln/>
-        </p:spPr>
-      </p:sp>
-      <p:sp>
-        <p:nvSpPr>
-          <p:cNvPr id="11" name="Text 8"/>
-          <p:cNvSpPr/>
-          <p:nvPr/>
-        </p:nvSpPr>
-        <p:spPr>
-          <a:xfrm>
-            <a:off x="502920" y="3044952"/>
-            <a:ext cx="384048" cy="384048"/>
-          </a:xfrm>
-          <a:prstGeom prst="rect">
-            <a:avLst/>
-          </a:prstGeom>
-          <a:noFill/>
-          <a:ln/>
-        </p:spPr>
-        <p:txBody>
-          <a:bodyPr wrap="square" lIns="0" tIns="0" rIns="0" bIns="0" rtlCol="0" anchor="ctr"/>
-          <a:lstStyle/>
-          <a:p>
-            <a:pPr algn="ctr" indent="0" marL="0">
-              <a:buNone/>
-            </a:pPr>
-            <a:r>
-              <a:rPr lang="en-US" sz="1500" b="1" dirty="0">
-                <a:solidFill>
-                  <a:srgbClr val="0E1726"/>
-                </a:solidFill>
-                <a:latin typeface="Arial" pitchFamily="34" charset="0"/>
-                <a:ea typeface="Arial" pitchFamily="34" charset="-122"/>
-                <a:cs typeface="Arial" pitchFamily="34" charset="-120"/>
-              </a:rPr>
-              <a:t>2</a:t>
-            </a:r>
-            <a:endParaRPr lang="en-US" sz="1500" dirty="0"/>
-          </a:p>
-        </p:txBody>
-      </p:sp>
-      <p:sp>
-        <p:nvSpPr>
-          <p:cNvPr id="12" name="Text 9"/>
-          <p:cNvSpPr/>
-          <p:nvPr/>
-        </p:nvSpPr>
-        <p:spPr>
-          <a:xfrm>
-            <a:off x="1051560" y="3044952"/>
-            <a:ext cx="7589520" cy="402336"/>
-          </a:xfrm>
-          <a:prstGeom prst="rect">
-            <a:avLst/>
-          </a:prstGeom>
-          <a:noFill/>
-          <a:ln/>
-        </p:spPr>
-        <p:txBody>
-          <a:bodyPr wrap="square" lIns="0" tIns="0" rIns="0" bIns="0" rtlCol="0" anchor="ctr">
-            <a:normAutofit/>
-          </a:bodyPr>
-          <a:lstStyle/>
-          <a:p>
-            <a:pPr indent="0" marL="0">
-              <a:buNone/>
-            </a:pPr>
-            <a:r>
-              <a:rPr lang="en-US" sz="1350" dirty="0">
+              <a:t>Framework auto-escaping (don't bypass with innerHTML/dangerouslySetInnerHTML)</a:t>
+            </a:r>
+            <a:endParaRPr lang="en-US" sz="1400" dirty="0"/>
+          </a:p>
+          <a:p>
+            <a:pPr marL="342900" indent="-342900">
+              <a:spcAft>
+                <a:spcPts val="600"/>
+              </a:spcAft>
+              <a:buSzPct val="100000"/>
+              <a:buChar char="•"/>
+            </a:pPr>
+            <a:r>
+              <a:rPr lang="en-US" sz="1400" dirty="0">
                 <a:solidFill>
                   <a:srgbClr val="1F2937"/>
                 </a:solidFill>
@@ -3766,99 +3744,20 @@
                 <a:ea typeface="Calibri" pitchFamily="34" charset="-122"/>
                 <a:cs typeface="Calibri" pitchFamily="34" charset="-120"/>
               </a:rPr>
-              <a:t>Demonstrate cookie theft via the stored payload</a:t>
-            </a:r>
-            <a:endParaRPr lang="en-US" sz="1350" dirty="0"/>
-          </a:p>
-        </p:txBody>
-      </p:sp>
-      <p:sp>
-        <p:nvSpPr>
-          <p:cNvPr id="13" name="Shape 10"/>
-          <p:cNvSpPr/>
-          <p:nvPr/>
-        </p:nvSpPr>
-        <p:spPr>
-          <a:xfrm>
-            <a:off x="502920" y="3520440"/>
-            <a:ext cx="384048" cy="384048"/>
-          </a:xfrm>
-          <a:prstGeom prst="ellipse">
-            <a:avLst/>
-          </a:prstGeom>
-          <a:solidFill>
-            <a:srgbClr val="E35205"/>
-          </a:solidFill>
-          <a:ln/>
-        </p:spPr>
-      </p:sp>
-      <p:sp>
-        <p:nvSpPr>
-          <p:cNvPr id="14" name="Text 11"/>
-          <p:cNvSpPr/>
-          <p:nvPr/>
-        </p:nvSpPr>
-        <p:spPr>
-          <a:xfrm>
-            <a:off x="502920" y="3520440"/>
-            <a:ext cx="384048" cy="384048"/>
-          </a:xfrm>
-          <a:prstGeom prst="rect">
-            <a:avLst/>
-          </a:prstGeom>
-          <a:noFill/>
-          <a:ln/>
-        </p:spPr>
-        <p:txBody>
-          <a:bodyPr wrap="square" lIns="0" tIns="0" rIns="0" bIns="0" rtlCol="0" anchor="ctr"/>
-          <a:lstStyle/>
-          <a:p>
-            <a:pPr algn="ctr" indent="0" marL="0">
-              <a:buNone/>
-            </a:pPr>
-            <a:r>
-              <a:rPr lang="en-US" sz="1500" b="1" dirty="0">
-                <a:solidFill>
-                  <a:srgbClr val="0E1726"/>
-                </a:solidFill>
-                <a:latin typeface="Arial" pitchFamily="34" charset="0"/>
-                <a:ea typeface="Arial" pitchFamily="34" charset="-122"/>
-                <a:cs typeface="Arial" pitchFamily="34" charset="-120"/>
-              </a:rPr>
-              <a:t>3</a:t>
-            </a:r>
-            <a:endParaRPr lang="en-US" sz="1500" dirty="0"/>
-          </a:p>
-        </p:txBody>
-      </p:sp>
-      <p:sp>
-        <p:nvSpPr>
-          <p:cNvPr id="15" name="Text 12"/>
-          <p:cNvSpPr/>
-          <p:nvPr/>
-        </p:nvSpPr>
-        <p:spPr>
-          <a:xfrm>
-            <a:off x="1051560" y="3520440"/>
-            <a:ext cx="7589520" cy="402336"/>
-          </a:xfrm>
-          <a:prstGeom prst="rect">
-            <a:avLst/>
-          </a:prstGeom>
-          <a:noFill/>
-          <a:ln/>
-        </p:spPr>
-        <p:txBody>
-          <a:bodyPr wrap="square" lIns="0" tIns="0" rIns="0" bIns="0" rtlCol="0" anchor="ctr">
-            <a:normAutofit/>
-          </a:bodyPr>
-          <a:lstStyle/>
-          <a:p>
-            <a:pPr indent="0" marL="0">
-              <a:buNone/>
-            </a:pPr>
-            <a:r>
-              <a:rPr lang="en-US" sz="1350" dirty="0">
+              <a:t>Content Security Policy — a defense-in-depth header, set alongside escaping — it doesn't replace it</a:t>
+            </a:r>
+            <a:endParaRPr lang="en-US" sz="1400" dirty="0"/>
+          </a:p>
+          <a:p>
+            <a:pPr marL="342900" indent="-342900">
+              <a:spcAft>
+                <a:spcPts val="600"/>
+              </a:spcAft>
+              <a:buSzPct val="100000"/>
+              <a:buChar char="•"/>
+            </a:pPr>
+            <a:r>
+              <a:rPr lang="en-US" sz="1400" dirty="0">
                 <a:solidFill>
                   <a:srgbClr val="1F2937"/>
                 </a:solidFill>
@@ -3866,15 +3765,15 @@
                 <a:ea typeface="Calibri" pitchFamily="34" charset="-122"/>
                 <a:cs typeface="Calibri" pitchFamily="34" charset="-120"/>
               </a:rPr>
-              <a:t>Run fixed_app.py — confirm output encoding + CSP now block your XSS payloads</a:t>
-            </a:r>
-            <a:endParaRPr lang="en-US" sz="1350" dirty="0"/>
-          </a:p>
-        </p:txBody>
-      </p:sp>
-      <p:sp>
-        <p:nvSpPr>
-          <p:cNvPr id="16" name="Text 13"/>
+              <a:t>HttpOnly + SameSite cookies; anti-CSRF tokens and an endpoint that actually checks who's asking</a:t>
+            </a:r>
+            <a:endParaRPr lang="en-US" sz="1400" dirty="0"/>
+          </a:p>
+        </p:txBody>
+      </p:sp>
+      <p:sp>
+        <p:nvSpPr>
+          <p:cNvPr id="7" name="Text 4"/>
           <p:cNvSpPr/>
           <p:nvPr/>
         </p:nvSpPr>
@@ -3913,7 +3812,7 @@
       </p:sp>
       <p:pic>
         <p:nvPicPr>
-          <p:cNvPr id="17" name="Image 1" descr="/Users/pop7/Library/CloudStorage/OneDrive-MonsterConnectCo.,Ltd/Lecture/KOSEN69 - software-security/slides/pptx/assets/logo-small.png">    </p:cNvPr>
+          <p:cNvPr id="8" name="Image 1" descr="/Users/pop7/Library/CloudStorage/OneDrive-MonsterConnectCo.,Ltd/Lecture/KOSEN69 - software-security/slides/pptx/assets/logo-small.png">    </p:cNvPr>
           <p:cNvPicPr>
             <a:picLocks noChangeAspect="1"/>
           </p:cNvPicPr>
@@ -4051,7 +3950,7 @@
                 <a:ea typeface="Arial" pitchFamily="34" charset="-122"/>
                 <a:cs typeface="Arial" pitchFamily="34" charset="-120"/>
               </a:rPr>
-              <a:t>Lab steps (cont.)</a:t>
+              <a:t>⛳ Game — XSS Golf</a:t>
             </a:r>
             <a:endParaRPr lang="en-US" sz="2600" dirty="0"/>
           </a:p>
@@ -4059,34 +3958,14 @@
       </p:sp>
       <p:sp>
         <p:nvSpPr>
-          <p:cNvPr id="5" name="Shape 2"/>
-          <p:cNvSpPr/>
-          <p:nvPr/>
-        </p:nvSpPr>
-        <p:spPr>
-          <a:xfrm>
-            <a:off x="502920" y="1325880"/>
-            <a:ext cx="384048" cy="384048"/>
-          </a:xfrm>
-          <a:prstGeom prst="ellipse">
-            <a:avLst/>
-          </a:prstGeom>
-          <a:solidFill>
-            <a:srgbClr val="E35205"/>
-          </a:solidFill>
-          <a:ln/>
-        </p:spPr>
-      </p:sp>
-      <p:sp>
-        <p:nvSpPr>
-          <p:cNvPr id="6" name="Text 3"/>
-          <p:cNvSpPr/>
-          <p:nvPr/>
-        </p:nvSpPr>
-        <p:spPr>
-          <a:xfrm>
-            <a:off x="502920" y="1325880"/>
-            <a:ext cx="384048" cy="384048"/>
+          <p:cNvPr id="5" name="Text 2"/>
+          <p:cNvSpPr/>
+          <p:nvPr/>
+        </p:nvSpPr>
+        <p:spPr>
+          <a:xfrm>
+            <a:off x="548640" y="1325880"/>
+            <a:ext cx="8046720" cy="822960"/>
           </a:xfrm>
           <a:prstGeom prst="rect">
             <a:avLst/>
@@ -4095,46 +3974,7 @@
           <a:ln/>
         </p:spPr>
         <p:txBody>
-          <a:bodyPr wrap="square" lIns="0" tIns="0" rIns="0" bIns="0" rtlCol="0" anchor="ctr"/>
-          <a:lstStyle/>
-          <a:p>
-            <a:pPr algn="ctr" indent="0" marL="0">
-              <a:buNone/>
-            </a:pPr>
-            <a:r>
-              <a:rPr lang="en-US" sz="1500" b="1" dirty="0">
-                <a:solidFill>
-                  <a:srgbClr val="0E1726"/>
-                </a:solidFill>
-                <a:latin typeface="Arial" pitchFamily="34" charset="0"/>
-                <a:ea typeface="Arial" pitchFamily="34" charset="-122"/>
-                <a:cs typeface="Arial" pitchFamily="34" charset="-120"/>
-              </a:rPr>
-              <a:t>4</a:t>
-            </a:r>
-            <a:endParaRPr lang="en-US" sz="1500" dirty="0"/>
-          </a:p>
-        </p:txBody>
-      </p:sp>
-      <p:sp>
-        <p:nvSpPr>
-          <p:cNvPr id="7" name="Text 4"/>
-          <p:cNvSpPr/>
-          <p:nvPr/>
-        </p:nvSpPr>
-        <p:spPr>
-          <a:xfrm>
-            <a:off x="1051560" y="1325880"/>
-            <a:ext cx="7589520" cy="658368"/>
-          </a:xfrm>
-          <a:prstGeom prst="rect">
-            <a:avLst/>
-          </a:prstGeom>
-          <a:noFill/>
-          <a:ln/>
-        </p:spPr>
-        <p:txBody>
-          <a:bodyPr wrap="square" lIns="0" tIns="0" rIns="0" bIns="0" rtlCol="0" anchor="ctr">
+          <a:bodyPr wrap="square" lIns="0" tIns="0" rIns="0" bIns="0" rtlCol="0" anchor="t">
             <a:normAutofit/>
           </a:bodyPr>
           <a:lstStyle/>
@@ -4143,7 +3983,7 @@
               <a:buNone/>
             </a:pPr>
             <a:r>
-              <a:rPr lang="en-US" sz="1350" dirty="0">
+              <a:rPr lang="en-US" sz="1400" dirty="0">
                 <a:solidFill>
                   <a:srgbClr val="1F2937"/>
                 </a:solidFill>
@@ -4151,9 +3991,104 @@
                 <a:ea typeface="Calibri" pitchFamily="34" charset="-122"/>
                 <a:cs typeface="Calibri" pitchFamily="34" charset="-120"/>
               </a:rPr>
-              <a:t>Demonstrate CSRF still succeeds against fixed_app.py — explain why SameSite didn't stop it</a:t>
-            </a:r>
-            <a:endParaRPr lang="en-US" sz="1350" dirty="0"/>
+              <a:t>Craft the shortest payload that pops alert(1) / steals a cookie against vulnerable_app.py.</a:t>
+            </a:r>
+            <a:endParaRPr lang="en-US" sz="1400" dirty="0"/>
+          </a:p>
+        </p:txBody>
+      </p:sp>
+      <p:sp>
+        <p:nvSpPr>
+          <p:cNvPr id="6" name="Shape 3"/>
+          <p:cNvSpPr/>
+          <p:nvPr/>
+        </p:nvSpPr>
+        <p:spPr>
+          <a:xfrm>
+            <a:off x="457200" y="2240280"/>
+            <a:ext cx="8229600" cy="1298448"/>
+          </a:xfrm>
+          <a:prstGeom prst="roundRect">
+            <a:avLst>
+              <a:gd name="adj" fmla="val 5634"/>
+            </a:avLst>
+          </a:prstGeom>
+          <a:solidFill>
+            <a:srgbClr val="F1F5F9"/>
+          </a:solidFill>
+          <a:ln/>
+          <a:effectLst>
+            <a:outerShdw sx="100000" sy="100000" kx="0" ky="0" algn="bl" rotWithShape="0" blurRad="76200" dist="25400" dir="5400000">
+              <a:srgbClr val="000000">
+                <a:alpha val="12000"/>
+              </a:srgbClr>
+            </a:outerShdw>
+          </a:effectLst>
+        </p:spPr>
+      </p:sp>
+      <p:sp>
+        <p:nvSpPr>
+          <p:cNvPr id="7" name="Text 4"/>
+          <p:cNvSpPr/>
+          <p:nvPr/>
+        </p:nvSpPr>
+        <p:spPr>
+          <a:xfrm>
+            <a:off x="731520" y="2350008"/>
+            <a:ext cx="7680960" cy="1078992"/>
+          </a:xfrm>
+          <a:prstGeom prst="rect">
+            <a:avLst/>
+          </a:prstGeom>
+          <a:noFill/>
+          <a:ln/>
+        </p:spPr>
+        <p:txBody>
+          <a:bodyPr wrap="square" lIns="0" tIns="0" rIns="0" bIns="0" rtlCol="0" anchor="t">
+            <a:normAutofit/>
+          </a:bodyPr>
+          <a:lstStyle/>
+          <a:p>
+            <a:pPr marL="342900" indent="-342900">
+              <a:spcAft>
+                <a:spcPts val="600"/>
+              </a:spcAft>
+              <a:buSzPct val="100000"/>
+              <a:buChar char="•"/>
+            </a:pPr>
+            <a:r>
+              <a:rPr lang="en-US" sz="1400" dirty="0">
+                <a:solidFill>
+                  <a:srgbClr val="1F2937"/>
+                </a:solidFill>
+                <a:latin typeface="Calibri" pitchFamily="34" charset="0"/>
+                <a:ea typeface="Calibri" pitchFamily="34" charset="-122"/>
+                <a:cs typeface="Calibri" pitchFamily="34" charset="-120"/>
+              </a:rPr>
+              <a:t>Solo scoring by character count (no filter to beat — it's a golf exercise, not a bypass race)</a:t>
+            </a:r>
+            <a:endParaRPr lang="en-US" sz="1400" dirty="0"/>
+          </a:p>
+          <a:p>
+            <a:pPr marL="342900" indent="-342900">
+              <a:spcAft>
+                <a:spcPts val="600"/>
+              </a:spcAft>
+              <a:buSzPct val="100000"/>
+              <a:buChar char="•"/>
+            </a:pPr>
+            <a:r>
+              <a:rPr lang="en-US" sz="1400" dirty="0">
+                <a:solidFill>
+                  <a:srgbClr val="1F2937"/>
+                </a:solidFill>
+                <a:latin typeface="Calibri" pitchFamily="34" charset="0"/>
+                <a:ea typeface="Calibri" pitchFamily="34" charset="-122"/>
+                <a:cs typeface="Calibri" pitchFamily="34" charset="-120"/>
+              </a:rPr>
+              <a:t>Defend: run fixed_app.py — same payloads, now escaped — then prove CSRF still works against it and explain why</a:t>
+            </a:r>
+            <a:endParaRPr lang="en-US" sz="1400" dirty="0"/>
           </a:p>
         </p:txBody>
       </p:sp>
@@ -4336,7 +4271,7 @@
                 <a:ea typeface="Arial" pitchFamily="34" charset="-122"/>
                 <a:cs typeface="Arial" pitchFamily="34" charset="-120"/>
               </a:rPr>
-              <a:t>Deliverable</a:t>
+              <a:t>Lab steps</a:t>
             </a:r>
             <a:endParaRPr lang="en-US" sz="2600" dirty="0"/>
           </a:p>
@@ -4351,24 +4286,17 @@
         <p:spPr>
           <a:xfrm>
             <a:off x="457200" y="1325880"/>
-            <a:ext cx="8229600" cy="1719072"/>
+            <a:ext cx="8229600" cy="822960"/>
           </a:xfrm>
           <a:prstGeom prst="roundRect">
             <a:avLst>
-              <a:gd name="adj" fmla="val 4255"/>
+              <a:gd name="adj" fmla="val 8889"/>
             </a:avLst>
           </a:prstGeom>
           <a:solidFill>
-            <a:srgbClr val="F1F5F9"/>
+            <a:srgbClr val="E8EDF3"/>
           </a:solidFill>
           <a:ln/>
-          <a:effectLst>
-            <a:outerShdw sx="100000" sy="100000" kx="0" ky="0" algn="bl" rotWithShape="0" blurRad="76200" dist="25400" dir="5400000">
-              <a:srgbClr val="000000">
-                <a:alpha val="12000"/>
-              </a:srgbClr>
-            </a:outerShdw>
-          </a:effectLst>
         </p:spPr>
       </p:sp>
       <p:sp>
@@ -4379,8 +4307,8 @@
         </p:nvSpPr>
         <p:spPr>
           <a:xfrm>
-            <a:off x="731520" y="1435608"/>
-            <a:ext cx="7680960" cy="1499616"/>
+            <a:off x="731520" y="1325880"/>
+            <a:ext cx="7680960" cy="822960"/>
           </a:xfrm>
           <a:prstGeom prst="rect">
             <a:avLst/>
@@ -4389,41 +4317,116 @@
           <a:ln/>
         </p:spPr>
         <p:txBody>
-          <a:bodyPr wrap="square" lIns="0" tIns="0" rIns="0" bIns="0" rtlCol="0" anchor="t">
+          <a:bodyPr wrap="square" lIns="0" tIns="0" rIns="0" bIns="0" rtlCol="0" anchor="ctr">
             <a:normAutofit/>
           </a:bodyPr>
           <a:lstStyle/>
           <a:p>
-            <a:pPr marL="342900" indent="-342900">
-              <a:spcAft>
-                <a:spcPts val="600"/>
-              </a:spcAft>
-              <a:buSzPct val="100000"/>
-              <a:buChar char="•"/>
-            </a:pPr>
-            <a:r>
-              <a:rPr lang="en-US" sz="1400" dirty="0">
-                <a:solidFill>
-                  <a:srgbClr val="1F2937"/>
+            <a:pPr indent="0" marL="0">
+              <a:buNone/>
+            </a:pPr>
+            <a:r>
+              <a:rPr lang="en-US" sz="1400" i="1" dirty="0">
+                <a:solidFill>
+                  <a:srgbClr val="E35205"/>
                 </a:solidFill>
                 <a:latin typeface="Calibri" pitchFamily="34" charset="0"/>
                 <a:ea typeface="Calibri" pitchFamily="34" charset="-122"/>
                 <a:cs typeface="Calibri" pitchFamily="34" charset="-120"/>
               </a:rPr>
-              <a:t>Each XSS type with payload + context</a:t>
+              <a:t>📋 Worksheet 5 — labs/week05-xss-client-side/worksheet.md (Part 3) · kickoff: docker compose up → http://localhost:8080</a:t>
             </a:r>
             <a:endParaRPr lang="en-US" sz="1400" dirty="0"/>
           </a:p>
-          <a:p>
-            <a:pPr marL="342900" indent="-342900">
-              <a:spcAft>
-                <a:spcPts val="600"/>
-              </a:spcAft>
-              <a:buSzPct val="100000"/>
-              <a:buChar char="•"/>
-            </a:pPr>
-            <a:r>
-              <a:rPr lang="en-US" sz="1400" dirty="0">
+        </p:txBody>
+      </p:sp>
+      <p:sp>
+        <p:nvSpPr>
+          <p:cNvPr id="7" name="Shape 4"/>
+          <p:cNvSpPr/>
+          <p:nvPr/>
+        </p:nvSpPr>
+        <p:spPr>
+          <a:xfrm>
+            <a:off x="502920" y="2313432"/>
+            <a:ext cx="384048" cy="384048"/>
+          </a:xfrm>
+          <a:prstGeom prst="ellipse">
+            <a:avLst/>
+          </a:prstGeom>
+          <a:solidFill>
+            <a:srgbClr val="E35205"/>
+          </a:solidFill>
+          <a:ln/>
+        </p:spPr>
+      </p:sp>
+      <p:sp>
+        <p:nvSpPr>
+          <p:cNvPr id="8" name="Text 5"/>
+          <p:cNvSpPr/>
+          <p:nvPr/>
+        </p:nvSpPr>
+        <p:spPr>
+          <a:xfrm>
+            <a:off x="502920" y="2313432"/>
+            <a:ext cx="384048" cy="384048"/>
+          </a:xfrm>
+          <a:prstGeom prst="rect">
+            <a:avLst/>
+          </a:prstGeom>
+          <a:noFill/>
+          <a:ln/>
+        </p:spPr>
+        <p:txBody>
+          <a:bodyPr wrap="square" lIns="0" tIns="0" rIns="0" bIns="0" rtlCol="0" anchor="ctr"/>
+          <a:lstStyle/>
+          <a:p>
+            <a:pPr algn="ctr" indent="0" marL="0">
+              <a:buNone/>
+            </a:pPr>
+            <a:r>
+              <a:rPr lang="en-US" sz="1500" b="1" dirty="0">
+                <a:solidFill>
+                  <a:srgbClr val="0E1726"/>
+                </a:solidFill>
+                <a:latin typeface="Arial" pitchFamily="34" charset="0"/>
+                <a:ea typeface="Arial" pitchFamily="34" charset="-122"/>
+                <a:cs typeface="Arial" pitchFamily="34" charset="-120"/>
+              </a:rPr>
+              <a:t>1</a:t>
+            </a:r>
+            <a:endParaRPr lang="en-US" sz="1500" dirty="0"/>
+          </a:p>
+        </p:txBody>
+      </p:sp>
+      <p:sp>
+        <p:nvSpPr>
+          <p:cNvPr id="9" name="Text 6"/>
+          <p:cNvSpPr/>
+          <p:nvPr/>
+        </p:nvSpPr>
+        <p:spPr>
+          <a:xfrm>
+            <a:off x="1051560" y="2313432"/>
+            <a:ext cx="7589520" cy="658368"/>
+          </a:xfrm>
+          <a:prstGeom prst="rect">
+            <a:avLst/>
+          </a:prstGeom>
+          <a:noFill/>
+          <a:ln/>
+        </p:spPr>
+        <p:txBody>
+          <a:bodyPr wrap="square" lIns="0" tIns="0" rIns="0" bIns="0" rtlCol="0" anchor="ctr">
+            <a:normAutofit/>
+          </a:bodyPr>
+          <a:lstStyle/>
+          <a:p>
+            <a:pPr indent="0" marL="0">
+              <a:buNone/>
+            </a:pPr>
+            <a:r>
+              <a:rPr lang="en-US" sz="1350" dirty="0">
                 <a:solidFill>
                   <a:srgbClr val="1F2937"/>
                 </a:solidFill>
@@ -4431,20 +4434,99 @@
                 <a:ea typeface="Calibri" pitchFamily="34" charset="-122"/>
                 <a:cs typeface="Calibri" pitchFamily="34" charset="-120"/>
               </a:rPr>
-              <a:t>Escaping + CSP that blocks them (show before/after)</a:t>
-            </a:r>
-            <a:endParaRPr lang="en-US" sz="1400" dirty="0"/>
-          </a:p>
-          <a:p>
-            <a:pPr marL="342900" indent="-342900">
-              <a:spcAft>
-                <a:spcPts val="600"/>
-              </a:spcAft>
-              <a:buSzPct val="100000"/>
-              <a:buChar char="•"/>
-            </a:pPr>
-            <a:r>
-              <a:rPr lang="en-US" sz="1400" dirty="0">
+              <a:t>Find reflected + stored XSS in vulnerable_app.py (DOM XSS via Juice Shop is optional/ungraded)</a:t>
+            </a:r>
+            <a:endParaRPr lang="en-US" sz="1350" dirty="0"/>
+          </a:p>
+        </p:txBody>
+      </p:sp>
+      <p:sp>
+        <p:nvSpPr>
+          <p:cNvPr id="10" name="Shape 7"/>
+          <p:cNvSpPr/>
+          <p:nvPr/>
+        </p:nvSpPr>
+        <p:spPr>
+          <a:xfrm>
+            <a:off x="502920" y="3044952"/>
+            <a:ext cx="384048" cy="384048"/>
+          </a:xfrm>
+          <a:prstGeom prst="ellipse">
+            <a:avLst/>
+          </a:prstGeom>
+          <a:solidFill>
+            <a:srgbClr val="E35205"/>
+          </a:solidFill>
+          <a:ln/>
+        </p:spPr>
+      </p:sp>
+      <p:sp>
+        <p:nvSpPr>
+          <p:cNvPr id="11" name="Text 8"/>
+          <p:cNvSpPr/>
+          <p:nvPr/>
+        </p:nvSpPr>
+        <p:spPr>
+          <a:xfrm>
+            <a:off x="502920" y="3044952"/>
+            <a:ext cx="384048" cy="384048"/>
+          </a:xfrm>
+          <a:prstGeom prst="rect">
+            <a:avLst/>
+          </a:prstGeom>
+          <a:noFill/>
+          <a:ln/>
+        </p:spPr>
+        <p:txBody>
+          <a:bodyPr wrap="square" lIns="0" tIns="0" rIns="0" bIns="0" rtlCol="0" anchor="ctr"/>
+          <a:lstStyle/>
+          <a:p>
+            <a:pPr algn="ctr" indent="0" marL="0">
+              <a:buNone/>
+            </a:pPr>
+            <a:r>
+              <a:rPr lang="en-US" sz="1500" b="1" dirty="0">
+                <a:solidFill>
+                  <a:srgbClr val="0E1726"/>
+                </a:solidFill>
+                <a:latin typeface="Arial" pitchFamily="34" charset="0"/>
+                <a:ea typeface="Arial" pitchFamily="34" charset="-122"/>
+                <a:cs typeface="Arial" pitchFamily="34" charset="-120"/>
+              </a:rPr>
+              <a:t>2</a:t>
+            </a:r>
+            <a:endParaRPr lang="en-US" sz="1500" dirty="0"/>
+          </a:p>
+        </p:txBody>
+      </p:sp>
+      <p:sp>
+        <p:nvSpPr>
+          <p:cNvPr id="12" name="Text 9"/>
+          <p:cNvSpPr/>
+          <p:nvPr/>
+        </p:nvSpPr>
+        <p:spPr>
+          <a:xfrm>
+            <a:off x="1051560" y="3044952"/>
+            <a:ext cx="7589520" cy="402336"/>
+          </a:xfrm>
+          <a:prstGeom prst="rect">
+            <a:avLst/>
+          </a:prstGeom>
+          <a:noFill/>
+          <a:ln/>
+        </p:spPr>
+        <p:txBody>
+          <a:bodyPr wrap="square" lIns="0" tIns="0" rIns="0" bIns="0" rtlCol="0" anchor="ctr">
+            <a:normAutofit/>
+          </a:bodyPr>
+          <a:lstStyle/>
+          <a:p>
+            <a:pPr indent="0" marL="0">
+              <a:buNone/>
+            </a:pPr>
+            <a:r>
+              <a:rPr lang="en-US" sz="1350" dirty="0">
                 <a:solidFill>
                   <a:srgbClr val="1F2937"/>
                 </a:solidFill>
@@ -4452,20 +4534,99 @@
                 <a:ea typeface="Calibri" pitchFamily="34" charset="-122"/>
                 <a:cs typeface="Calibri" pitchFamily="34" charset="-120"/>
               </a:rPr>
-              <a:t>Short note: why CSRF still succeeds against fixed_app.py despite SameSite=Strict</a:t>
-            </a:r>
-            <a:endParaRPr lang="en-US" sz="1400" dirty="0"/>
-          </a:p>
-          <a:p>
-            <a:pPr marL="342900" indent="-342900">
-              <a:spcAft>
-                <a:spcPts val="600"/>
-              </a:spcAft>
-              <a:buSzPct val="100000"/>
-              <a:buChar char="•"/>
-            </a:pPr>
-            <a:r>
-              <a:rPr lang="en-US" sz="1400" dirty="0">
+              <a:t>Demonstrate cookie theft via the stored payload</a:t>
+            </a:r>
+            <a:endParaRPr lang="en-US" sz="1350" dirty="0"/>
+          </a:p>
+        </p:txBody>
+      </p:sp>
+      <p:sp>
+        <p:nvSpPr>
+          <p:cNvPr id="13" name="Shape 10"/>
+          <p:cNvSpPr/>
+          <p:nvPr/>
+        </p:nvSpPr>
+        <p:spPr>
+          <a:xfrm>
+            <a:off x="502920" y="3520440"/>
+            <a:ext cx="384048" cy="384048"/>
+          </a:xfrm>
+          <a:prstGeom prst="ellipse">
+            <a:avLst/>
+          </a:prstGeom>
+          <a:solidFill>
+            <a:srgbClr val="E35205"/>
+          </a:solidFill>
+          <a:ln/>
+        </p:spPr>
+      </p:sp>
+      <p:sp>
+        <p:nvSpPr>
+          <p:cNvPr id="14" name="Text 11"/>
+          <p:cNvSpPr/>
+          <p:nvPr/>
+        </p:nvSpPr>
+        <p:spPr>
+          <a:xfrm>
+            <a:off x="502920" y="3520440"/>
+            <a:ext cx="384048" cy="384048"/>
+          </a:xfrm>
+          <a:prstGeom prst="rect">
+            <a:avLst/>
+          </a:prstGeom>
+          <a:noFill/>
+          <a:ln/>
+        </p:spPr>
+        <p:txBody>
+          <a:bodyPr wrap="square" lIns="0" tIns="0" rIns="0" bIns="0" rtlCol="0" anchor="ctr"/>
+          <a:lstStyle/>
+          <a:p>
+            <a:pPr algn="ctr" indent="0" marL="0">
+              <a:buNone/>
+            </a:pPr>
+            <a:r>
+              <a:rPr lang="en-US" sz="1500" b="1" dirty="0">
+                <a:solidFill>
+                  <a:srgbClr val="0E1726"/>
+                </a:solidFill>
+                <a:latin typeface="Arial" pitchFamily="34" charset="0"/>
+                <a:ea typeface="Arial" pitchFamily="34" charset="-122"/>
+                <a:cs typeface="Arial" pitchFamily="34" charset="-120"/>
+              </a:rPr>
+              <a:t>3</a:t>
+            </a:r>
+            <a:endParaRPr lang="en-US" sz="1500" dirty="0"/>
+          </a:p>
+        </p:txBody>
+      </p:sp>
+      <p:sp>
+        <p:nvSpPr>
+          <p:cNvPr id="15" name="Text 12"/>
+          <p:cNvSpPr/>
+          <p:nvPr/>
+        </p:nvSpPr>
+        <p:spPr>
+          <a:xfrm>
+            <a:off x="1051560" y="3520440"/>
+            <a:ext cx="7589520" cy="402336"/>
+          </a:xfrm>
+          <a:prstGeom prst="rect">
+            <a:avLst/>
+          </a:prstGeom>
+          <a:noFill/>
+          <a:ln/>
+        </p:spPr>
+        <p:txBody>
+          <a:bodyPr wrap="square" lIns="0" tIns="0" rIns="0" bIns="0" rtlCol="0" anchor="ctr">
+            <a:normAutofit/>
+          </a:bodyPr>
+          <a:lstStyle/>
+          <a:p>
+            <a:pPr indent="0" marL="0">
+              <a:buNone/>
+            </a:pPr>
+            <a:r>
+              <a:rPr lang="en-US" sz="1350" dirty="0">
                 <a:solidFill>
                   <a:srgbClr val="1F2937"/>
                 </a:solidFill>
@@ -4473,15 +4634,15 @@
                 <a:ea typeface="Calibri" pitchFamily="34" charset="-122"/>
                 <a:cs typeface="Calibri" pitchFamily="34" charset="-120"/>
               </a:rPr>
-              <a:t>+ Audit the AI / EiPE / Prompt Problem (see worksheet)</a:t>
-            </a:r>
-            <a:endParaRPr lang="en-US" sz="1400" dirty="0"/>
-          </a:p>
-        </p:txBody>
-      </p:sp>
-      <p:sp>
-        <p:nvSpPr>
-          <p:cNvPr id="7" name="Text 4"/>
+              <a:t>Run fixed_app.py — confirm output encoding + CSP now block your XSS payloads</a:t>
+            </a:r>
+            <a:endParaRPr lang="en-US" sz="1350" dirty="0"/>
+          </a:p>
+        </p:txBody>
+      </p:sp>
+      <p:sp>
+        <p:nvSpPr>
+          <p:cNvPr id="16" name="Text 13"/>
           <p:cNvSpPr/>
           <p:nvPr/>
         </p:nvSpPr>
@@ -4520,7 +4681,7 @@
       </p:sp>
       <p:pic>
         <p:nvPicPr>
-          <p:cNvPr id="8" name="Image 1" descr="/Users/pop7/Library/CloudStorage/OneDrive-MonsterConnectCo.,Ltd/Lecture/KOSEN69 - software-security/slides/pptx/assets/logo-small.png">    </p:cNvPr>
+          <p:cNvPr id="17" name="Image 1" descr="/Users/pop7/Library/CloudStorage/OneDrive-MonsterConnectCo.,Ltd/Lecture/KOSEN69 - software-security/slides/pptx/assets/logo-small.png">    </p:cNvPr>
           <p:cNvPicPr>
             <a:picLocks noChangeAspect="1"/>
           </p:cNvPicPr>
@@ -4658,7 +4819,7 @@
                 <a:ea typeface="Arial" pitchFamily="34" charset="-122"/>
                 <a:cs typeface="Arial" pitchFamily="34" charset="-120"/>
               </a:rPr>
-              <a:t>Key takeaways</a:t>
+              <a:t>Lab steps (cont.)</a:t>
             </a:r>
             <a:endParaRPr lang="en-US" sz="2600" dirty="0"/>
           </a:p>
@@ -4672,25 +4833,16 @@
         </p:nvSpPr>
         <p:spPr>
           <a:xfrm>
-            <a:off x="457200" y="1325880"/>
-            <a:ext cx="8229600" cy="1408176"/>
-          </a:xfrm>
-          <a:prstGeom prst="roundRect">
-            <a:avLst>
-              <a:gd name="adj" fmla="val 5195"/>
-            </a:avLst>
+            <a:off x="502920" y="1325880"/>
+            <a:ext cx="384048" cy="384048"/>
+          </a:xfrm>
+          <a:prstGeom prst="ellipse">
+            <a:avLst/>
           </a:prstGeom>
           <a:solidFill>
-            <a:srgbClr val="F1F5F9"/>
+            <a:srgbClr val="E35205"/>
           </a:solidFill>
           <a:ln/>
-          <a:effectLst>
-            <a:outerShdw sx="100000" sy="100000" kx="0" ky="0" algn="bl" rotWithShape="0" blurRad="76200" dist="25400" dir="5400000">
-              <a:srgbClr val="000000">
-                <a:alpha val="12000"/>
-              </a:srgbClr>
-            </a:outerShdw>
-          </a:effectLst>
         </p:spPr>
       </p:sp>
       <p:sp>
@@ -4701,8 +4853,8 @@
         </p:nvSpPr>
         <p:spPr>
           <a:xfrm>
-            <a:off x="731520" y="1435608"/>
-            <a:ext cx="7680960" cy="1188720"/>
+            <a:off x="502920" y="1325880"/>
+            <a:ext cx="384048" cy="384048"/>
           </a:xfrm>
           <a:prstGeom prst="rect">
             <a:avLst/>
@@ -4711,20 +4863,55 @@
           <a:ln/>
         </p:spPr>
         <p:txBody>
-          <a:bodyPr wrap="square" lIns="0" tIns="0" rIns="0" bIns="0" rtlCol="0" anchor="t">
+          <a:bodyPr wrap="square" lIns="0" tIns="0" rIns="0" bIns="0" rtlCol="0" anchor="ctr"/>
+          <a:lstStyle/>
+          <a:p>
+            <a:pPr algn="ctr" indent="0" marL="0">
+              <a:buNone/>
+            </a:pPr>
+            <a:r>
+              <a:rPr lang="en-US" sz="1500" b="1" dirty="0">
+                <a:solidFill>
+                  <a:srgbClr val="0E1726"/>
+                </a:solidFill>
+                <a:latin typeface="Arial" pitchFamily="34" charset="0"/>
+                <a:ea typeface="Arial" pitchFamily="34" charset="-122"/>
+                <a:cs typeface="Arial" pitchFamily="34" charset="-120"/>
+              </a:rPr>
+              <a:t>4</a:t>
+            </a:r>
+            <a:endParaRPr lang="en-US" sz="1500" dirty="0"/>
+          </a:p>
+        </p:txBody>
+      </p:sp>
+      <p:sp>
+        <p:nvSpPr>
+          <p:cNvPr id="7" name="Text 4"/>
+          <p:cNvSpPr/>
+          <p:nvPr/>
+        </p:nvSpPr>
+        <p:spPr>
+          <a:xfrm>
+            <a:off x="1051560" y="1325880"/>
+            <a:ext cx="7589520" cy="658368"/>
+          </a:xfrm>
+          <a:prstGeom prst="rect">
+            <a:avLst/>
+          </a:prstGeom>
+          <a:noFill/>
+          <a:ln/>
+        </p:spPr>
+        <p:txBody>
+          <a:bodyPr wrap="square" lIns="0" tIns="0" rIns="0" bIns="0" rtlCol="0" anchor="ctr">
             <a:normAutofit/>
           </a:bodyPr>
           <a:lstStyle/>
           <a:p>
-            <a:pPr marL="342900" indent="-342900">
-              <a:spcAft>
-                <a:spcPts val="600"/>
-              </a:spcAft>
-              <a:buSzPct val="100000"/>
-              <a:buChar char="•"/>
-            </a:pPr>
-            <a:r>
-              <a:rPr lang="en-US" sz="1400" dirty="0">
+            <a:pPr indent="0" marL="0">
+              <a:buNone/>
+            </a:pPr>
+            <a:r>
+              <a:rPr lang="en-US" sz="1350" dirty="0">
                 <a:solidFill>
                   <a:srgbClr val="1F2937"/>
                 </a:solidFill>
@@ -4732,87 +4919,45 @@
                 <a:ea typeface="Calibri" pitchFamily="34" charset="-122"/>
                 <a:cs typeface="Calibri" pitchFamily="34" charset="-120"/>
               </a:rPr>
-              <a:t>XSS is injection on the output side — encode for the context</a:t>
-            </a:r>
-            <a:endParaRPr lang="en-US" sz="1400" dirty="0"/>
-          </a:p>
-          <a:p>
-            <a:pPr marL="342900" indent="-342900">
-              <a:spcAft>
-                <a:spcPts val="600"/>
-              </a:spcAft>
-              <a:buSzPct val="100000"/>
-              <a:buChar char="•"/>
-            </a:pPr>
-            <a:r>
-              <a:rPr lang="en-US" sz="1400" dirty="0">
-                <a:solidFill>
-                  <a:srgbClr val="1F2937"/>
+              <a:t>Demonstrate CSRF still succeeds against fixed_app.py — explain why SameSite didn't stop it</a:t>
+            </a:r>
+            <a:endParaRPr lang="en-US" sz="1350" dirty="0"/>
+          </a:p>
+        </p:txBody>
+      </p:sp>
+      <p:sp>
+        <p:nvSpPr>
+          <p:cNvPr id="8" name="Text 5"/>
+          <p:cNvSpPr/>
+          <p:nvPr/>
+        </p:nvSpPr>
+        <p:spPr>
+          <a:xfrm>
+            <a:off x="457200" y="4800600"/>
+            <a:ext cx="6949440" cy="274320"/>
+          </a:xfrm>
+          <a:prstGeom prst="rect">
+            <a:avLst/>
+          </a:prstGeom>
+          <a:noFill/>
+          <a:ln/>
+        </p:spPr>
+        <p:txBody>
+          <a:bodyPr wrap="square" lIns="0" tIns="0" rIns="0" bIns="0" rtlCol="0" anchor="ctr"/>
+          <a:lstStyle/>
+          <a:p>
+            <a:pPr indent="0" marL="0">
+              <a:buNone/>
+            </a:pPr>
+            <a:r>
+              <a:rPr lang="en-US" sz="900" dirty="0">
+                <a:solidFill>
+                  <a:srgbClr val="64748B"/>
                 </a:solidFill>
                 <a:latin typeface="Calibri" pitchFamily="34" charset="0"/>
                 <a:ea typeface="Calibri" pitchFamily="34" charset="-122"/>
                 <a:cs typeface="Calibri" pitchFamily="34" charset="-120"/>
               </a:rPr>
-              <a:t>CSP is defense-in-depth, not a substitute for encoding</a:t>
-            </a:r>
-            <a:endParaRPr lang="en-US" sz="1400" dirty="0"/>
-          </a:p>
-          <a:p>
-            <a:pPr marL="342900" indent="-342900">
-              <a:spcAft>
-                <a:spcPts val="600"/>
-              </a:spcAft>
-              <a:buSzPct val="100000"/>
-              <a:buChar char="•"/>
-            </a:pPr>
-            <a:r>
-              <a:rPr lang="en-US" sz="1400" dirty="0">
-                <a:solidFill>
-                  <a:srgbClr val="1F2937"/>
-                </a:solidFill>
-                <a:latin typeface="Calibri" pitchFamily="34" charset="0"/>
-                <a:ea typeface="Calibri" pitchFamily="34" charset="-122"/>
-                <a:cs typeface="Calibri" pitchFamily="34" charset="-120"/>
-              </a:rPr>
-              <a:t>SameSite cookies stop the cookie attaching cross-site — they don't stop a request being accepted if the endpoint never checks authorization</a:t>
-            </a:r>
-            <a:endParaRPr lang="en-US" sz="1400" dirty="0"/>
-          </a:p>
-        </p:txBody>
-      </p:sp>
-      <p:sp>
-        <p:nvSpPr>
-          <p:cNvPr id="7" name="Text 4"/>
-          <p:cNvSpPr/>
-          <p:nvPr/>
-        </p:nvSpPr>
-        <p:spPr>
-          <a:xfrm>
-            <a:off x="457200" y="4800600"/>
-            <a:ext cx="6949440" cy="274320"/>
-          </a:xfrm>
-          <a:prstGeom prst="rect">
-            <a:avLst/>
-          </a:prstGeom>
-          <a:noFill/>
-          <a:ln/>
-        </p:spPr>
-        <p:txBody>
-          <a:bodyPr wrap="square" lIns="0" tIns="0" rIns="0" bIns="0" rtlCol="0" anchor="ctr"/>
-          <a:lstStyle/>
-          <a:p>
-            <a:pPr indent="0" marL="0">
-              <a:buNone/>
-            </a:pPr>
-            <a:r>
-              <a:rPr lang="en-US" sz="900" dirty="0">
-                <a:solidFill>
-                  <a:srgbClr val="64748B"/>
-                </a:solidFill>
-                <a:latin typeface="Calibri" pitchFamily="34" charset="0"/>
-                <a:ea typeface="Calibri" pitchFamily="34" charset="-122"/>
-                <a:cs typeface="Calibri" pitchFamily="34" charset="-120"/>
-              </a:rPr>
               <a:t>Software Security · Week 5</a:t>
             </a:r>
             <a:endParaRPr lang="en-US" sz="900" dirty="0"/>
@@ -4821,7 +4966,7 @@
       </p:sp>
       <p:pic>
         <p:nvPicPr>
-          <p:cNvPr id="8" name="Image 1" descr="/Users/pop7/Library/CloudStorage/OneDrive-MonsterConnectCo.,Ltd/Lecture/KOSEN69 - software-security/slides/pptx/assets/logo-small.png">    </p:cNvPr>
+          <p:cNvPr id="9" name="Image 1" descr="/Users/pop7/Library/CloudStorage/OneDrive-MonsterConnectCo.,Ltd/Lecture/KOSEN69 - software-security/slides/pptx/assets/logo-small.png">    </p:cNvPr>
           <p:cNvPicPr>
             <a:picLocks noChangeAspect="1"/>
           </p:cNvPicPr>
@@ -4854,6 +4999,629 @@
 <file path=ppt/slides/slide17.xml><?xml version="1.0" encoding="utf-8"?>
 <p:sld xmlns:a="http://schemas.openxmlformats.org/drawingml/2006/main" xmlns:r="http://schemas.openxmlformats.org/officeDocument/2006/relationships" xmlns:p="http://schemas.openxmlformats.org/presentationml/2006/main">
   <p:cSld name="Slide 17">
+    <p:bg>
+      <p:bgPr>
+        <a:solidFill>
+          <a:srgbClr val="FFFFFF"/>
+        </a:solidFill>
+      </p:bgPr>
+    </p:bg>
+    <p:spTree>
+      <p:nvGrpSpPr>
+        <p:cNvPr id="1" name=""/>
+        <p:cNvGrpSpPr/>
+        <p:nvPr/>
+      </p:nvGrpSpPr>
+      <p:grpSpPr>
+        <a:xfrm>
+          <a:off x="0" y="0"/>
+          <a:ext cx="0" cy="0"/>
+          <a:chOff x="0" y="0"/>
+          <a:chExt cx="0" cy="0"/>
+        </a:xfrm>
+      </p:grpSpPr>
+      <p:sp>
+        <p:nvSpPr>
+          <p:cNvPr id="2" name="Shape 0"/>
+          <p:cNvSpPr/>
+          <p:nvPr/>
+        </p:nvSpPr>
+        <p:spPr>
+          <a:xfrm>
+            <a:off x="457200" y="384048"/>
+            <a:ext cx="530352" cy="530352"/>
+          </a:xfrm>
+          <a:prstGeom prst="ellipse">
+            <a:avLst/>
+          </a:prstGeom>
+          <a:solidFill>
+            <a:srgbClr val="E35205"/>
+          </a:solidFill>
+          <a:ln/>
+          <a:effectLst>
+            <a:outerShdw sx="100000" sy="100000" kx="0" ky="0" algn="bl" rotWithShape="0" blurRad="76200" dist="25400" dir="5400000">
+              <a:srgbClr val="000000">
+                <a:alpha val="12000"/>
+              </a:srgbClr>
+            </a:outerShdw>
+          </a:effectLst>
+        </p:spPr>
+      </p:sp>
+      <p:pic>
+        <p:nvPicPr>
+          <p:cNvPr id="3" name="Image 0" descr="preencoded.png">    </p:cNvPr>
+          <p:cNvPicPr>
+            <a:picLocks noChangeAspect="1"/>
+          </p:cNvPicPr>
+          <p:nvPr/>
+        </p:nvPicPr>
+        <p:blipFill>
+          <a:blip r:embed="rId1"/>
+          <a:stretch>
+            <a:fillRect/>
+          </a:stretch>
+        </p:blipFill>
+        <p:spPr>
+          <a:xfrm>
+            <a:off x="594360" y="521208"/>
+            <a:ext cx="256032" cy="256032"/>
+          </a:xfrm>
+          <a:prstGeom prst="rect">
+            <a:avLst/>
+          </a:prstGeom>
+        </p:spPr>
+      </p:pic>
+      <p:sp>
+        <p:nvSpPr>
+          <p:cNvPr id="4" name="Text 1"/>
+          <p:cNvSpPr/>
+          <p:nvPr/>
+        </p:nvSpPr>
+        <p:spPr>
+          <a:xfrm>
+            <a:off x="1143000" y="329184"/>
+            <a:ext cx="7498080" cy="603504"/>
+          </a:xfrm>
+          <a:prstGeom prst="rect">
+            <a:avLst/>
+          </a:prstGeom>
+          <a:noFill/>
+          <a:ln/>
+        </p:spPr>
+        <p:txBody>
+          <a:bodyPr wrap="square" lIns="0" tIns="0" rIns="0" bIns="0" rtlCol="0" anchor="ctr"/>
+          <a:lstStyle/>
+          <a:p>
+            <a:pPr indent="0" marL="0">
+              <a:buNone/>
+            </a:pPr>
+            <a:r>
+              <a:rPr lang="en-US" sz="2600" b="1" dirty="0">
+                <a:solidFill>
+                  <a:srgbClr val="1F2937"/>
+                </a:solidFill>
+                <a:latin typeface="Arial" pitchFamily="34" charset="0"/>
+                <a:ea typeface="Arial" pitchFamily="34" charset="-122"/>
+                <a:cs typeface="Arial" pitchFamily="34" charset="-120"/>
+              </a:rPr>
+              <a:t>Deliverable</a:t>
+            </a:r>
+            <a:endParaRPr lang="en-US" sz="2600" dirty="0"/>
+          </a:p>
+        </p:txBody>
+      </p:sp>
+      <p:sp>
+        <p:nvSpPr>
+          <p:cNvPr id="5" name="Shape 2"/>
+          <p:cNvSpPr/>
+          <p:nvPr/>
+        </p:nvSpPr>
+        <p:spPr>
+          <a:xfrm>
+            <a:off x="457200" y="1325880"/>
+            <a:ext cx="8229600" cy="1719072"/>
+          </a:xfrm>
+          <a:prstGeom prst="roundRect">
+            <a:avLst>
+              <a:gd name="adj" fmla="val 4255"/>
+            </a:avLst>
+          </a:prstGeom>
+          <a:solidFill>
+            <a:srgbClr val="F1F5F9"/>
+          </a:solidFill>
+          <a:ln/>
+          <a:effectLst>
+            <a:outerShdw sx="100000" sy="100000" kx="0" ky="0" algn="bl" rotWithShape="0" blurRad="76200" dist="25400" dir="5400000">
+              <a:srgbClr val="000000">
+                <a:alpha val="12000"/>
+              </a:srgbClr>
+            </a:outerShdw>
+          </a:effectLst>
+        </p:spPr>
+      </p:sp>
+      <p:sp>
+        <p:nvSpPr>
+          <p:cNvPr id="6" name="Text 3"/>
+          <p:cNvSpPr/>
+          <p:nvPr/>
+        </p:nvSpPr>
+        <p:spPr>
+          <a:xfrm>
+            <a:off x="731520" y="1435608"/>
+            <a:ext cx="7680960" cy="1499616"/>
+          </a:xfrm>
+          <a:prstGeom prst="rect">
+            <a:avLst/>
+          </a:prstGeom>
+          <a:noFill/>
+          <a:ln/>
+        </p:spPr>
+        <p:txBody>
+          <a:bodyPr wrap="square" lIns="0" tIns="0" rIns="0" bIns="0" rtlCol="0" anchor="t">
+            <a:normAutofit/>
+          </a:bodyPr>
+          <a:lstStyle/>
+          <a:p>
+            <a:pPr marL="342900" indent="-342900">
+              <a:spcAft>
+                <a:spcPts val="600"/>
+              </a:spcAft>
+              <a:buSzPct val="100000"/>
+              <a:buChar char="•"/>
+            </a:pPr>
+            <a:r>
+              <a:rPr lang="en-US" sz="1400" dirty="0">
+                <a:solidFill>
+                  <a:srgbClr val="1F2937"/>
+                </a:solidFill>
+                <a:latin typeface="Calibri" pitchFamily="34" charset="0"/>
+                <a:ea typeface="Calibri" pitchFamily="34" charset="-122"/>
+                <a:cs typeface="Calibri" pitchFamily="34" charset="-120"/>
+              </a:rPr>
+              <a:t>Each XSS type with payload + context</a:t>
+            </a:r>
+            <a:endParaRPr lang="en-US" sz="1400" dirty="0"/>
+          </a:p>
+          <a:p>
+            <a:pPr marL="342900" indent="-342900">
+              <a:spcAft>
+                <a:spcPts val="600"/>
+              </a:spcAft>
+              <a:buSzPct val="100000"/>
+              <a:buChar char="•"/>
+            </a:pPr>
+            <a:r>
+              <a:rPr lang="en-US" sz="1400" dirty="0">
+                <a:solidFill>
+                  <a:srgbClr val="1F2937"/>
+                </a:solidFill>
+                <a:latin typeface="Calibri" pitchFamily="34" charset="0"/>
+                <a:ea typeface="Calibri" pitchFamily="34" charset="-122"/>
+                <a:cs typeface="Calibri" pitchFamily="34" charset="-120"/>
+              </a:rPr>
+              <a:t>Escaping + CSP that blocks them (show before/after)</a:t>
+            </a:r>
+            <a:endParaRPr lang="en-US" sz="1400" dirty="0"/>
+          </a:p>
+          <a:p>
+            <a:pPr marL="342900" indent="-342900">
+              <a:spcAft>
+                <a:spcPts val="600"/>
+              </a:spcAft>
+              <a:buSzPct val="100000"/>
+              <a:buChar char="•"/>
+            </a:pPr>
+            <a:r>
+              <a:rPr lang="en-US" sz="1400" dirty="0">
+                <a:solidFill>
+                  <a:srgbClr val="1F2937"/>
+                </a:solidFill>
+                <a:latin typeface="Calibri" pitchFamily="34" charset="0"/>
+                <a:ea typeface="Calibri" pitchFamily="34" charset="-122"/>
+                <a:cs typeface="Calibri" pitchFamily="34" charset="-120"/>
+              </a:rPr>
+              <a:t>Short note: why CSRF still succeeds against fixed_app.py despite SameSite=Strict</a:t>
+            </a:r>
+            <a:endParaRPr lang="en-US" sz="1400" dirty="0"/>
+          </a:p>
+          <a:p>
+            <a:pPr marL="342900" indent="-342900">
+              <a:spcAft>
+                <a:spcPts val="600"/>
+              </a:spcAft>
+              <a:buSzPct val="100000"/>
+              <a:buChar char="•"/>
+            </a:pPr>
+            <a:r>
+              <a:rPr lang="en-US" sz="1400" dirty="0">
+                <a:solidFill>
+                  <a:srgbClr val="1F2937"/>
+                </a:solidFill>
+                <a:latin typeface="Calibri" pitchFamily="34" charset="0"/>
+                <a:ea typeface="Calibri" pitchFamily="34" charset="-122"/>
+                <a:cs typeface="Calibri" pitchFamily="34" charset="-120"/>
+              </a:rPr>
+              <a:t>+ Audit the AI / EiPE / Prompt Problem (see worksheet)</a:t>
+            </a:r>
+            <a:endParaRPr lang="en-US" sz="1400" dirty="0"/>
+          </a:p>
+        </p:txBody>
+      </p:sp>
+      <p:sp>
+        <p:nvSpPr>
+          <p:cNvPr id="7" name="Text 4"/>
+          <p:cNvSpPr/>
+          <p:nvPr/>
+        </p:nvSpPr>
+        <p:spPr>
+          <a:xfrm>
+            <a:off x="457200" y="4800600"/>
+            <a:ext cx="6949440" cy="274320"/>
+          </a:xfrm>
+          <a:prstGeom prst="rect">
+            <a:avLst/>
+          </a:prstGeom>
+          <a:noFill/>
+          <a:ln/>
+        </p:spPr>
+        <p:txBody>
+          <a:bodyPr wrap="square" lIns="0" tIns="0" rIns="0" bIns="0" rtlCol="0" anchor="ctr"/>
+          <a:lstStyle/>
+          <a:p>
+            <a:pPr indent="0" marL="0">
+              <a:buNone/>
+            </a:pPr>
+            <a:r>
+              <a:rPr lang="en-US" sz="900" dirty="0">
+                <a:solidFill>
+                  <a:srgbClr val="64748B"/>
+                </a:solidFill>
+                <a:latin typeface="Calibri" pitchFamily="34" charset="0"/>
+                <a:ea typeface="Calibri" pitchFamily="34" charset="-122"/>
+                <a:cs typeface="Calibri" pitchFamily="34" charset="-120"/>
+              </a:rPr>
+              <a:t>Software Security · Week 5</a:t>
+            </a:r>
+            <a:endParaRPr lang="en-US" sz="900" dirty="0"/>
+          </a:p>
+        </p:txBody>
+      </p:sp>
+      <p:pic>
+        <p:nvPicPr>
+          <p:cNvPr id="8" name="Image 1" descr="/Users/pop7/Library/CloudStorage/OneDrive-MonsterConnectCo.,Ltd/Lecture/KOSEN69 - software-security/slides/pptx/assets/logo-small.png">    </p:cNvPr>
+          <p:cNvPicPr>
+            <a:picLocks noChangeAspect="1"/>
+          </p:cNvPicPr>
+          <p:nvPr/>
+        </p:nvPicPr>
+        <p:blipFill>
+          <a:blip r:embed="rId2"/>
+          <a:stretch>
+            <a:fillRect/>
+          </a:stretch>
+        </p:blipFill>
+        <p:spPr>
+          <a:xfrm>
+            <a:off x="7882128" y="4700016"/>
+            <a:ext cx="768096" cy="356616"/>
+          </a:xfrm>
+          <a:prstGeom prst="rect">
+            <a:avLst/>
+          </a:prstGeom>
+        </p:spPr>
+      </p:pic>
+    </p:spTree>
+  </p:cSld>
+  <p:clrMapOvr>
+    <a:masterClrMapping/>
+  </p:clrMapOvr>
+</p:sld>
+</file>
+
+<file path=ppt/slides/slide18.xml><?xml version="1.0" encoding="utf-8"?>
+<p:sld xmlns:a="http://schemas.openxmlformats.org/drawingml/2006/main" xmlns:r="http://schemas.openxmlformats.org/officeDocument/2006/relationships" xmlns:p="http://schemas.openxmlformats.org/presentationml/2006/main">
+  <p:cSld name="Slide 18">
+    <p:bg>
+      <p:bgPr>
+        <a:solidFill>
+          <a:srgbClr val="FFFFFF"/>
+        </a:solidFill>
+      </p:bgPr>
+    </p:bg>
+    <p:spTree>
+      <p:nvGrpSpPr>
+        <p:cNvPr id="1" name=""/>
+        <p:cNvGrpSpPr/>
+        <p:nvPr/>
+      </p:nvGrpSpPr>
+      <p:grpSpPr>
+        <a:xfrm>
+          <a:off x="0" y="0"/>
+          <a:ext cx="0" cy="0"/>
+          <a:chOff x="0" y="0"/>
+          <a:chExt cx="0" cy="0"/>
+        </a:xfrm>
+      </p:grpSpPr>
+      <p:sp>
+        <p:nvSpPr>
+          <p:cNvPr id="2" name="Shape 0"/>
+          <p:cNvSpPr/>
+          <p:nvPr/>
+        </p:nvSpPr>
+        <p:spPr>
+          <a:xfrm>
+            <a:off x="457200" y="384048"/>
+            <a:ext cx="530352" cy="530352"/>
+          </a:xfrm>
+          <a:prstGeom prst="ellipse">
+            <a:avLst/>
+          </a:prstGeom>
+          <a:solidFill>
+            <a:srgbClr val="E35205"/>
+          </a:solidFill>
+          <a:ln/>
+          <a:effectLst>
+            <a:outerShdw sx="100000" sy="100000" kx="0" ky="0" algn="bl" rotWithShape="0" blurRad="76200" dist="25400" dir="5400000">
+              <a:srgbClr val="000000">
+                <a:alpha val="12000"/>
+              </a:srgbClr>
+            </a:outerShdw>
+          </a:effectLst>
+        </p:spPr>
+      </p:sp>
+      <p:pic>
+        <p:nvPicPr>
+          <p:cNvPr id="3" name="Image 0" descr="preencoded.png">    </p:cNvPr>
+          <p:cNvPicPr>
+            <a:picLocks noChangeAspect="1"/>
+          </p:cNvPicPr>
+          <p:nvPr/>
+        </p:nvPicPr>
+        <p:blipFill>
+          <a:blip r:embed="rId1"/>
+          <a:stretch>
+            <a:fillRect/>
+          </a:stretch>
+        </p:blipFill>
+        <p:spPr>
+          <a:xfrm>
+            <a:off x="594360" y="521208"/>
+            <a:ext cx="256032" cy="256032"/>
+          </a:xfrm>
+          <a:prstGeom prst="rect">
+            <a:avLst/>
+          </a:prstGeom>
+        </p:spPr>
+      </p:pic>
+      <p:sp>
+        <p:nvSpPr>
+          <p:cNvPr id="4" name="Text 1"/>
+          <p:cNvSpPr/>
+          <p:nvPr/>
+        </p:nvSpPr>
+        <p:spPr>
+          <a:xfrm>
+            <a:off x="1143000" y="329184"/>
+            <a:ext cx="7498080" cy="603504"/>
+          </a:xfrm>
+          <a:prstGeom prst="rect">
+            <a:avLst/>
+          </a:prstGeom>
+          <a:noFill/>
+          <a:ln/>
+        </p:spPr>
+        <p:txBody>
+          <a:bodyPr wrap="square" lIns="0" tIns="0" rIns="0" bIns="0" rtlCol="0" anchor="ctr"/>
+          <a:lstStyle/>
+          <a:p>
+            <a:pPr indent="0" marL="0">
+              <a:buNone/>
+            </a:pPr>
+            <a:r>
+              <a:rPr lang="en-US" sz="2600" b="1" dirty="0">
+                <a:solidFill>
+                  <a:srgbClr val="1F2937"/>
+                </a:solidFill>
+                <a:latin typeface="Arial" pitchFamily="34" charset="0"/>
+                <a:ea typeface="Arial" pitchFamily="34" charset="-122"/>
+                <a:cs typeface="Arial" pitchFamily="34" charset="-120"/>
+              </a:rPr>
+              <a:t>Key takeaways</a:t>
+            </a:r>
+            <a:endParaRPr lang="en-US" sz="2600" dirty="0"/>
+          </a:p>
+        </p:txBody>
+      </p:sp>
+      <p:sp>
+        <p:nvSpPr>
+          <p:cNvPr id="5" name="Shape 2"/>
+          <p:cNvSpPr/>
+          <p:nvPr/>
+        </p:nvSpPr>
+        <p:spPr>
+          <a:xfrm>
+            <a:off x="457200" y="1325880"/>
+            <a:ext cx="8229600" cy="1408176"/>
+          </a:xfrm>
+          <a:prstGeom prst="roundRect">
+            <a:avLst>
+              <a:gd name="adj" fmla="val 5195"/>
+            </a:avLst>
+          </a:prstGeom>
+          <a:solidFill>
+            <a:srgbClr val="F1F5F9"/>
+          </a:solidFill>
+          <a:ln/>
+          <a:effectLst>
+            <a:outerShdw sx="100000" sy="100000" kx="0" ky="0" algn="bl" rotWithShape="0" blurRad="76200" dist="25400" dir="5400000">
+              <a:srgbClr val="000000">
+                <a:alpha val="12000"/>
+              </a:srgbClr>
+            </a:outerShdw>
+          </a:effectLst>
+        </p:spPr>
+      </p:sp>
+      <p:sp>
+        <p:nvSpPr>
+          <p:cNvPr id="6" name="Text 3"/>
+          <p:cNvSpPr/>
+          <p:nvPr/>
+        </p:nvSpPr>
+        <p:spPr>
+          <a:xfrm>
+            <a:off x="731520" y="1435608"/>
+            <a:ext cx="7680960" cy="1188720"/>
+          </a:xfrm>
+          <a:prstGeom prst="rect">
+            <a:avLst/>
+          </a:prstGeom>
+          <a:noFill/>
+          <a:ln/>
+        </p:spPr>
+        <p:txBody>
+          <a:bodyPr wrap="square" lIns="0" tIns="0" rIns="0" bIns="0" rtlCol="0" anchor="t">
+            <a:normAutofit/>
+          </a:bodyPr>
+          <a:lstStyle/>
+          <a:p>
+            <a:pPr marL="342900" indent="-342900">
+              <a:spcAft>
+                <a:spcPts val="600"/>
+              </a:spcAft>
+              <a:buSzPct val="100000"/>
+              <a:buChar char="•"/>
+            </a:pPr>
+            <a:r>
+              <a:rPr lang="en-US" sz="1400" dirty="0">
+                <a:solidFill>
+                  <a:srgbClr val="1F2937"/>
+                </a:solidFill>
+                <a:latin typeface="Calibri" pitchFamily="34" charset="0"/>
+                <a:ea typeface="Calibri" pitchFamily="34" charset="-122"/>
+                <a:cs typeface="Calibri" pitchFamily="34" charset="-120"/>
+              </a:rPr>
+              <a:t>XSS is injection on the output side — encode for the context</a:t>
+            </a:r>
+            <a:endParaRPr lang="en-US" sz="1400" dirty="0"/>
+          </a:p>
+          <a:p>
+            <a:pPr marL="342900" indent="-342900">
+              <a:spcAft>
+                <a:spcPts val="600"/>
+              </a:spcAft>
+              <a:buSzPct val="100000"/>
+              <a:buChar char="•"/>
+            </a:pPr>
+            <a:r>
+              <a:rPr lang="en-US" sz="1400" dirty="0">
+                <a:solidFill>
+                  <a:srgbClr val="1F2937"/>
+                </a:solidFill>
+                <a:latin typeface="Calibri" pitchFamily="34" charset="0"/>
+                <a:ea typeface="Calibri" pitchFamily="34" charset="-122"/>
+                <a:cs typeface="Calibri" pitchFamily="34" charset="-120"/>
+              </a:rPr>
+              <a:t>CSP is defense-in-depth, not a substitute for encoding</a:t>
+            </a:r>
+            <a:endParaRPr lang="en-US" sz="1400" dirty="0"/>
+          </a:p>
+          <a:p>
+            <a:pPr marL="342900" indent="-342900">
+              <a:spcAft>
+                <a:spcPts val="600"/>
+              </a:spcAft>
+              <a:buSzPct val="100000"/>
+              <a:buChar char="•"/>
+            </a:pPr>
+            <a:r>
+              <a:rPr lang="en-US" sz="1400" dirty="0">
+                <a:solidFill>
+                  <a:srgbClr val="1F2937"/>
+                </a:solidFill>
+                <a:latin typeface="Calibri" pitchFamily="34" charset="0"/>
+                <a:ea typeface="Calibri" pitchFamily="34" charset="-122"/>
+                <a:cs typeface="Calibri" pitchFamily="34" charset="-120"/>
+              </a:rPr>
+              <a:t>SameSite cookies stop the cookie attaching cross-site — they don't stop a request being accepted if the endpoint never checks authorization</a:t>
+            </a:r>
+            <a:endParaRPr lang="en-US" sz="1400" dirty="0"/>
+          </a:p>
+        </p:txBody>
+      </p:sp>
+      <p:sp>
+        <p:nvSpPr>
+          <p:cNvPr id="7" name="Text 4"/>
+          <p:cNvSpPr/>
+          <p:nvPr/>
+        </p:nvSpPr>
+        <p:spPr>
+          <a:xfrm>
+            <a:off x="457200" y="4800600"/>
+            <a:ext cx="6949440" cy="274320"/>
+          </a:xfrm>
+          <a:prstGeom prst="rect">
+            <a:avLst/>
+          </a:prstGeom>
+          <a:noFill/>
+          <a:ln/>
+        </p:spPr>
+        <p:txBody>
+          <a:bodyPr wrap="square" lIns="0" tIns="0" rIns="0" bIns="0" rtlCol="0" anchor="ctr"/>
+          <a:lstStyle/>
+          <a:p>
+            <a:pPr indent="0" marL="0">
+              <a:buNone/>
+            </a:pPr>
+            <a:r>
+              <a:rPr lang="en-US" sz="900" dirty="0">
+                <a:solidFill>
+                  <a:srgbClr val="64748B"/>
+                </a:solidFill>
+                <a:latin typeface="Calibri" pitchFamily="34" charset="0"/>
+                <a:ea typeface="Calibri" pitchFamily="34" charset="-122"/>
+                <a:cs typeface="Calibri" pitchFamily="34" charset="-120"/>
+              </a:rPr>
+              <a:t>Software Security · Week 5</a:t>
+            </a:r>
+            <a:endParaRPr lang="en-US" sz="900" dirty="0"/>
+          </a:p>
+        </p:txBody>
+      </p:sp>
+      <p:pic>
+        <p:nvPicPr>
+          <p:cNvPr id="8" name="Image 1" descr="/Users/pop7/Library/CloudStorage/OneDrive-MonsterConnectCo.,Ltd/Lecture/KOSEN69 - software-security/slides/pptx/assets/logo-small.png">    </p:cNvPr>
+          <p:cNvPicPr>
+            <a:picLocks noChangeAspect="1"/>
+          </p:cNvPicPr>
+          <p:nvPr/>
+        </p:nvPicPr>
+        <p:blipFill>
+          <a:blip r:embed="rId2"/>
+          <a:stretch>
+            <a:fillRect/>
+          </a:stretch>
+        </p:blipFill>
+        <p:spPr>
+          <a:xfrm>
+            <a:off x="7882128" y="4700016"/>
+            <a:ext cx="768096" cy="356616"/>
+          </a:xfrm>
+          <a:prstGeom prst="rect">
+            <a:avLst/>
+          </a:prstGeom>
+        </p:spPr>
+      </p:pic>
+    </p:spTree>
+  </p:cSld>
+  <p:clrMapOvr>
+    <a:masterClrMapping/>
+  </p:clrMapOvr>
+</p:sld>
+</file>
+
+<file path=ppt/slides/slide19.xml><?xml version="1.0" encoding="utf-8"?>
+<p:sld xmlns:a="http://schemas.openxmlformats.org/drawingml/2006/main" xmlns:r="http://schemas.openxmlformats.org/officeDocument/2006/relationships" xmlns:p="http://schemas.openxmlformats.org/presentationml/2006/main">
+  <p:cSld name="Slide 19">
     <p:bg>
       <p:bgPr>
         <a:solidFill>
@@ -7548,7 +8316,7 @@
                 <a:ea typeface="Arial" pitchFamily="34" charset="-122"/>
                 <a:cs typeface="Arial" pitchFamily="34" charset="-120"/>
               </a:rPr>
-              <a:t>CSRF — riding the user's session</a:t>
+              <a:t>Try it — one value, four sinks</a:t>
             </a:r>
             <a:endParaRPr lang="en-US" sz="2600" dirty="0"/>
           </a:p>
@@ -7556,43 +8324,14 @@
       </p:sp>
       <p:sp>
         <p:nvSpPr>
-          <p:cNvPr id="5" name="Shape 2"/>
-          <p:cNvSpPr/>
-          <p:nvPr/>
-        </p:nvSpPr>
-        <p:spPr>
-          <a:xfrm>
-            <a:off x="457200" y="1325880"/>
-            <a:ext cx="8229600" cy="1810512"/>
-          </a:xfrm>
-          <a:prstGeom prst="roundRect">
-            <a:avLst>
-              <a:gd name="adj" fmla="val 4040"/>
-            </a:avLst>
-          </a:prstGeom>
-          <a:solidFill>
-            <a:srgbClr val="F1F5F9"/>
-          </a:solidFill>
-          <a:ln/>
-          <a:effectLst>
-            <a:outerShdw sx="100000" sy="100000" kx="0" ky="0" algn="bl" rotWithShape="0" blurRad="76200" dist="25400" dir="5400000">
-              <a:srgbClr val="000000">
-                <a:alpha val="12000"/>
-              </a:srgbClr>
-            </a:outerShdw>
-          </a:effectLst>
-        </p:spPr>
-      </p:sp>
-      <p:sp>
-        <p:nvSpPr>
-          <p:cNvPr id="6" name="Text 3"/>
-          <p:cNvSpPr/>
-          <p:nvPr/>
-        </p:nvSpPr>
-        <p:spPr>
-          <a:xfrm>
-            <a:off x="731520" y="1435608"/>
-            <a:ext cx="7680960" cy="1591056"/>
+          <p:cNvPr id="5" name="Text 2"/>
+          <p:cNvSpPr/>
+          <p:nvPr/>
+        </p:nvSpPr>
+        <p:spPr>
+          <a:xfrm>
+            <a:off x="548640" y="1325880"/>
+            <a:ext cx="8046720" cy="1371600"/>
           </a:xfrm>
           <a:prstGeom prst="rect">
             <a:avLst/>
@@ -7606,12 +8345,8 @@
           </a:bodyPr>
           <a:lstStyle/>
           <a:p>
-            <a:pPr marL="342900" indent="-342900">
-              <a:spcAft>
-                <a:spcPts val="600"/>
-              </a:spcAft>
-              <a:buSzPct val="100000"/>
-              <a:buChar char="•"/>
+            <a:pPr indent="0" marL="0">
+              <a:buNone/>
             </a:pPr>
             <a:r>
               <a:rPr lang="en-US" sz="1400" dirty="0">
@@ -7622,17 +8357,13 @@
                 <a:ea typeface="Calibri" pitchFamily="34" charset="-122"/>
                 <a:cs typeface="Calibri" pitchFamily="34" charset="-120"/>
               </a:rPr>
-              <a:t>Browser auto-sends cookies → attacker forges a state-changing request</a:t>
+              <a:t>The same input, landing in an HTML text node, an unquoted attribute, an</a:t>
             </a:r>
             <a:endParaRPr lang="en-US" sz="1400" dirty="0"/>
           </a:p>
           <a:p>
-            <a:pPr marL="342900" indent="-342900">
-              <a:spcAft>
-                <a:spcPts val="600"/>
-              </a:spcAft>
-              <a:buSzPct val="100000"/>
-              <a:buChar char="•"/>
+            <a:pPr indent="0" marL="0">
+              <a:buNone/>
             </a:pPr>
             <a:r>
               <a:rPr lang="en-US" sz="1400" dirty="0">
@@ -7643,17 +8374,13 @@
                 <a:ea typeface="Calibri" pitchFamily="34" charset="-122"/>
                 <a:cs typeface="Calibri" pitchFamily="34" charset="-120"/>
               </a:rPr>
-              <a:t>Real defenses: anti-CSRF tokens, checking Origin/Referer, and the endpoint actually checking who's asking</a:t>
+              <a:t>href="…", and a &lt;script&gt; string — at once. Pick an escaper, see which sinks it actually protects.</a:t>
             </a:r>
             <a:endParaRPr lang="en-US" sz="1400" dirty="0"/>
           </a:p>
           <a:p>
-            <a:pPr marL="342900" indent="-342900">
-              <a:spcAft>
-                <a:spcPts val="600"/>
-              </a:spcAft>
-              <a:buSzPct val="100000"/>
-              <a:buChar char="•"/>
+            <a:pPr indent="0" marL="0">
+              <a:buNone/>
             </a:pPr>
             <a:r>
               <a:rPr lang="en-US" sz="1400" dirty="0">
@@ -7664,7 +8391,7 @@
                 <a:ea typeface="Calibri" pitchFamily="34" charset="-122"/>
                 <a:cs typeface="Calibri" pitchFamily="34" charset="-120"/>
               </a:rPr>
-              <a:t>SameSite=Strict alone stops the cookie from attaching cross-site — it does not stop a request from being accepted if the endpoint never checks authorization in the first place (today's lab proves this)</a:t>
+              <a:t>Try it live: /sim/xss-context (interactive simulation, web only)</a:t>
             </a:r>
             <a:endParaRPr lang="en-US" sz="1400" dirty="0"/>
           </a:p>
@@ -7672,7 +8399,7 @@
       </p:sp>
       <p:sp>
         <p:nvSpPr>
-          <p:cNvPr id="7" name="Text 4"/>
+          <p:cNvPr id="6" name="Text 3"/>
           <p:cNvSpPr/>
           <p:nvPr/>
         </p:nvSpPr>
@@ -7711,7 +8438,7 @@
       </p:sp>
       <p:pic>
         <p:nvPicPr>
-          <p:cNvPr id="8" name="Image 1" descr="/Users/pop7/Library/CloudStorage/OneDrive-MonsterConnectCo.,Ltd/Lecture/KOSEN69 - software-security/slides/pptx/assets/logo-small.png">    </p:cNvPr>
+          <p:cNvPr id="7" name="Image 1" descr="/Users/pop7/Library/CloudStorage/OneDrive-MonsterConnectCo.,Ltd/Lecture/KOSEN69 - software-security/slides/pptx/assets/logo-small.png">    </p:cNvPr>
           <p:cNvPicPr>
             <a:picLocks noChangeAspect="1"/>
           </p:cNvPicPr>
@@ -7849,7 +8576,7 @@
                 <a:ea typeface="Arial" pitchFamily="34" charset="-122"/>
                 <a:cs typeface="Arial" pitchFamily="34" charset="-120"/>
               </a:rPr>
-              <a:t>Real-world: British Airways (2018)</a:t>
+              <a:t>CSRF — riding the user's session</a:t>
             </a:r>
             <a:endParaRPr lang="en-US" sz="2600" dirty="0"/>
           </a:p>
@@ -7864,11 +8591,11 @@
         <p:spPr>
           <a:xfrm>
             <a:off x="457200" y="1325880"/>
-            <a:ext cx="8229600" cy="1408176"/>
+            <a:ext cx="8229600" cy="1810512"/>
           </a:xfrm>
           <a:prstGeom prst="roundRect">
             <a:avLst>
-              <a:gd name="adj" fmla="val 5195"/>
+              <a:gd name="adj" fmla="val 4040"/>
             </a:avLst>
           </a:prstGeom>
           <a:solidFill>
@@ -7893,7 +8620,7 @@
         <p:spPr>
           <a:xfrm>
             <a:off x="731520" y="1435608"/>
-            <a:ext cx="7680960" cy="1188720"/>
+            <a:ext cx="7680960" cy="1591056"/>
           </a:xfrm>
           <a:prstGeom prst="rect">
             <a:avLst/>
@@ -7923,7 +8650,7 @@
                 <a:ea typeface="Calibri" pitchFamily="34" charset="-122"/>
                 <a:cs typeface="Calibri" pitchFamily="34" charset="-120"/>
               </a:rPr>
-              <a:t>Attackers injected malicious JS (Magecart) into BA's site/app</a:t>
+              <a:t>Browser auto-sends cookies → attacker forges a state-changing request</a:t>
             </a:r>
             <a:endParaRPr lang="en-US" sz="1400" dirty="0"/>
           </a:p>
@@ -7944,7 +8671,7 @@
                 <a:ea typeface="Calibri" pitchFamily="34" charset="-122"/>
                 <a:cs typeface="Calibri" pitchFamily="34" charset="-120"/>
               </a:rPr>
-              <a:t>Script skimmed credit-card details as users typed</a:t>
+              <a:t>Real defenses: anti-CSRF tokens, checking Origin/Referer, and the endpoint actually checking who's asking</a:t>
             </a:r>
             <a:endParaRPr lang="en-US" sz="1400" dirty="0"/>
           </a:p>
@@ -7965,7 +8692,7 @@
                 <a:ea typeface="Calibri" pitchFamily="34" charset="-122"/>
                 <a:cs typeface="Calibri" pitchFamily="34" charset="-120"/>
               </a:rPr>
-              <a:t>~380k payment records skimmed; ICO proposed a £183M fine, finalized at £20M (2020, ~89% reduction)</a:t>
+              <a:t>SameSite=Strict alone stops the cookie from attaching cross-site — it does not stop a request from being accepted if the endpoint never checks authorization in the first place (today's lab proves this)</a:t>
             </a:r>
             <a:endParaRPr lang="en-US" sz="1400" dirty="0"/>
           </a:p>
@@ -7973,36 +8700,14 @@
       </p:sp>
       <p:sp>
         <p:nvSpPr>
-          <p:cNvPr id="7" name="Shape 4"/>
-          <p:cNvSpPr/>
-          <p:nvPr/>
-        </p:nvSpPr>
-        <p:spPr>
-          <a:xfrm>
-            <a:off x="457200" y="2898648"/>
-            <a:ext cx="8229600" cy="822960"/>
-          </a:xfrm>
-          <a:prstGeom prst="roundRect">
-            <a:avLst>
-              <a:gd name="adj" fmla="val 8889"/>
-            </a:avLst>
-          </a:prstGeom>
-          <a:solidFill>
-            <a:srgbClr val="E8EDF3"/>
-          </a:solidFill>
-          <a:ln/>
-        </p:spPr>
-      </p:sp>
-      <p:sp>
-        <p:nvSpPr>
-          <p:cNvPr id="8" name="Text 5"/>
-          <p:cNvSpPr/>
-          <p:nvPr/>
-        </p:nvSpPr>
-        <p:spPr>
-          <a:xfrm>
-            <a:off x="731520" y="2898648"/>
-            <a:ext cx="7680960" cy="822960"/>
+          <p:cNvPr id="7" name="Text 4"/>
+          <p:cNvSpPr/>
+          <p:nvPr/>
+        </p:nvSpPr>
+        <p:spPr>
+          <a:xfrm>
+            <a:off x="457200" y="4800600"/>
+            <a:ext cx="6949440" cy="274320"/>
           </a:xfrm>
           <a:prstGeom prst="rect">
             <a:avLst/>
@@ -8011,62 +8716,21 @@
           <a:ln/>
         </p:spPr>
         <p:txBody>
-          <a:bodyPr wrap="square" lIns="0" tIns="0" rIns="0" bIns="0" rtlCol="0" anchor="ctr">
-            <a:normAutofit/>
-          </a:bodyPr>
+          <a:bodyPr wrap="square" lIns="0" tIns="0" rIns="0" bIns="0" rtlCol="0" anchor="ctr"/>
           <a:lstStyle/>
           <a:p>
             <a:pPr indent="0" marL="0">
               <a:buNone/>
             </a:pPr>
             <a:r>
-              <a:rPr lang="en-US" sz="1400" i="1" dirty="0">
-                <a:solidFill>
-                  <a:srgbClr val="E35205"/>
+              <a:rPr lang="en-US" sz="900" dirty="0">
+                <a:solidFill>
+                  <a:srgbClr val="64748B"/>
                 </a:solidFill>
                 <a:latin typeface="Calibri" pitchFamily="34" charset="0"/>
                 <a:ea typeface="Calibri" pitchFamily="34" charset="-122"/>
                 <a:cs typeface="Calibri" pitchFamily="34" charset="-120"/>
               </a:rPr>
-              <a:t>Client-side injection = real money + real fines.</a:t>
-            </a:r>
-            <a:endParaRPr lang="en-US" sz="1400" dirty="0"/>
-          </a:p>
-        </p:txBody>
-      </p:sp>
-      <p:sp>
-        <p:nvSpPr>
-          <p:cNvPr id="9" name="Text 6"/>
-          <p:cNvSpPr/>
-          <p:nvPr/>
-        </p:nvSpPr>
-        <p:spPr>
-          <a:xfrm>
-            <a:off x="457200" y="4800600"/>
-            <a:ext cx="6949440" cy="274320"/>
-          </a:xfrm>
-          <a:prstGeom prst="rect">
-            <a:avLst/>
-          </a:prstGeom>
-          <a:noFill/>
-          <a:ln/>
-        </p:spPr>
-        <p:txBody>
-          <a:bodyPr wrap="square" lIns="0" tIns="0" rIns="0" bIns="0" rtlCol="0" anchor="ctr"/>
-          <a:lstStyle/>
-          <a:p>
-            <a:pPr indent="0" marL="0">
-              <a:buNone/>
-            </a:pPr>
-            <a:r>
-              <a:rPr lang="en-US" sz="900" dirty="0">
-                <a:solidFill>
-                  <a:srgbClr val="64748B"/>
-                </a:solidFill>
-                <a:latin typeface="Calibri" pitchFamily="34" charset="0"/>
-                <a:ea typeface="Calibri" pitchFamily="34" charset="-122"/>
-                <a:cs typeface="Calibri" pitchFamily="34" charset="-120"/>
-              </a:rPr>
               <a:t>Software Security · Week 5</a:t>
             </a:r>
             <a:endParaRPr lang="en-US" sz="900" dirty="0"/>
@@ -8075,7 +8739,7 @@
       </p:sp>
       <p:pic>
         <p:nvPicPr>
-          <p:cNvPr id="10" name="Image 1" descr="/Users/pop7/Library/CloudStorage/OneDrive-MonsterConnectCo.,Ltd/Lecture/KOSEN69 - software-security/slides/pptx/assets/logo-small.png">    </p:cNvPr>
+          <p:cNvPr id="8" name="Image 1" descr="/Users/pop7/Library/CloudStorage/OneDrive-MonsterConnectCo.,Ltd/Lecture/KOSEN69 - software-security/slides/pptx/assets/logo-small.png">    </p:cNvPr>
           <p:cNvPicPr>
             <a:picLocks noChangeAspect="1"/>
           </p:cNvPicPr>
